--- a/samples/sample.pptx
+++ b/samples/sample.pptx
@@ -2,12 +2,12 @@
 <file path=ppt/presentation.xml><?xml version="1.0" encoding="utf-8"?>
 <p:presentation xmlns:a="http://schemas.openxmlformats.org/drawingml/2006/main" xmlns:r="http://schemas.openxmlformats.org/officeDocument/2006/relationships" xmlns:p="http://schemas.openxmlformats.org/presentationml/2006/main" saveSubsetFonts="1" autoCompressPictures="0">
   <p:sldMasterIdLst>
-    <p:sldMasterId id="2147483648" r:id="rId1"/>
+    <p:sldMasterId id="2147483660" r:id="rId1"/>
   </p:sldMasterIdLst>
   <p:sldIdLst>
     <p:sldId id="256" r:id="rId2"/>
   </p:sldIdLst>
-  <p:sldSz cx="12192000" cy="6858000"/>
+  <p:sldSz cx="9144000" cy="6858000" type="screen4x3"/>
   <p:notesSz cx="6858000" cy="9144000"/>
   <p:defaultTextStyle>
     <a:defPPr>
@@ -104,6 +104,11 @@
       </a:defRPr>
     </a:lvl9pPr>
   </p:defaultTextStyle>
+  <p:extLst>
+    <p:ext uri="{EFAFB233-063F-42B5-8137-9DF3F51BA10A}">
+      <p15:sldGuideLst xmlns:p15="http://schemas.microsoft.com/office/powerpoint/2012/main"/>
+    </p:ext>
+  </p:extLst>
 </p:presentation>
 </file>
 
@@ -136,8 +141,8 @@
         </p:nvSpPr>
         <p:spPr>
           <a:xfrm>
-            <a:off x="1524000" y="1122363"/>
-            <a:ext cx="9144000" cy="2387600"/>
+            <a:off x="685800" y="1122363"/>
+            <a:ext cx="7772400" cy="2387600"/>
           </a:xfrm>
         </p:spPr>
         <p:txBody>
@@ -152,7 +157,7 @@
               <a:rPr lang="en-US" smtClean="0"/>
               <a:t>Click to edit Master title style</a:t>
             </a:r>
-            <a:endParaRPr lang="en-US"/>
+            <a:endParaRPr lang="en-US" dirty="0"/>
           </a:p>
         </p:txBody>
       </p:sp>
@@ -168,8 +173,8 @@
         </p:nvSpPr>
         <p:spPr>
           <a:xfrm>
-            <a:off x="1524000" y="3602038"/>
-            <a:ext cx="9144000" cy="1655762"/>
+            <a:off x="1143000" y="3602038"/>
+            <a:ext cx="6858000" cy="1655762"/>
           </a:xfrm>
         </p:spPr>
         <p:txBody>
@@ -217,7 +222,7 @@
               <a:rPr lang="en-US" smtClean="0"/>
               <a:t>Click to edit Master subtitle style</a:t>
             </a:r>
-            <a:endParaRPr lang="en-US"/>
+            <a:endParaRPr lang="en-US" dirty="0"/>
           </a:p>
         </p:txBody>
       </p:sp>
@@ -238,7 +243,7 @@
           <a:p>
             <a:fld id="{4EC5E9F4-ABA9-7C48-8C55-E350C4AB4067}" type="datetimeFigureOut">
               <a:rPr lang="en-US" smtClean="0"/>
-              <a:t>2/13/17</a:t>
+              <a:t>2/27/17</a:t>
             </a:fld>
             <a:endParaRPr lang="en-US"/>
           </a:p>
@@ -287,11 +292,6 @@
         </p:txBody>
       </p:sp>
     </p:spTree>
-    <p:extLst>
-      <p:ext uri="{BB962C8B-B14F-4D97-AF65-F5344CB8AC3E}">
-        <p14:creationId xmlns:p14="http://schemas.microsoft.com/office/powerpoint/2010/main" val="1542299981"/>
-      </p:ext>
-    </p:extLst>
   </p:cSld>
   <p:clrMapOvr>
     <a:masterClrMapping/>
@@ -335,7 +335,7 @@
               <a:rPr lang="en-US" smtClean="0"/>
               <a:t>Click to edit Master title style</a:t>
             </a:r>
-            <a:endParaRPr lang="en-US"/>
+            <a:endParaRPr lang="en-US" dirty="0"/>
           </a:p>
         </p:txBody>
       </p:sp>
@@ -387,7 +387,7 @@
               <a:rPr lang="en-US" smtClean="0"/>
               <a:t>Fifth level</a:t>
             </a:r>
-            <a:endParaRPr lang="en-US"/>
+            <a:endParaRPr lang="en-US" dirty="0"/>
           </a:p>
         </p:txBody>
       </p:sp>
@@ -408,7 +408,7 @@
           <a:p>
             <a:fld id="{4EC5E9F4-ABA9-7C48-8C55-E350C4AB4067}" type="datetimeFigureOut">
               <a:rPr lang="en-US" smtClean="0"/>
-              <a:t>2/13/17</a:t>
+              <a:t>2/27/17</a:t>
             </a:fld>
             <a:endParaRPr lang="en-US"/>
           </a:p>
@@ -457,11 +457,6 @@
         </p:txBody>
       </p:sp>
     </p:spTree>
-    <p:extLst>
-      <p:ext uri="{BB962C8B-B14F-4D97-AF65-F5344CB8AC3E}">
-        <p14:creationId xmlns:p14="http://schemas.microsoft.com/office/powerpoint/2010/main" val="1750575512"/>
-      </p:ext>
-    </p:extLst>
   </p:cSld>
   <p:clrMapOvr>
     <a:masterClrMapping/>
@@ -498,8 +493,8 @@
         </p:nvSpPr>
         <p:spPr>
           <a:xfrm>
-            <a:off x="8724900" y="365125"/>
-            <a:ext cx="2628900" cy="5811838"/>
+            <a:off x="6543675" y="365125"/>
+            <a:ext cx="1971675" cy="5811838"/>
           </a:xfrm>
         </p:spPr>
         <p:txBody>
@@ -510,7 +505,7 @@
               <a:rPr lang="en-US" smtClean="0"/>
               <a:t>Click to edit Master title style</a:t>
             </a:r>
-            <a:endParaRPr lang="en-US"/>
+            <a:endParaRPr lang="en-US" dirty="0"/>
           </a:p>
         </p:txBody>
       </p:sp>
@@ -526,8 +521,8 @@
         </p:nvSpPr>
         <p:spPr>
           <a:xfrm>
-            <a:off x="838200" y="365125"/>
-            <a:ext cx="7734300" cy="5811838"/>
+            <a:off x="628650" y="365125"/>
+            <a:ext cx="5800725" cy="5811838"/>
           </a:xfrm>
         </p:spPr>
         <p:txBody>
@@ -567,7 +562,7 @@
               <a:rPr lang="en-US" smtClean="0"/>
               <a:t>Fifth level</a:t>
             </a:r>
-            <a:endParaRPr lang="en-US"/>
+            <a:endParaRPr lang="en-US" dirty="0"/>
           </a:p>
         </p:txBody>
       </p:sp>
@@ -588,7 +583,7 @@
           <a:p>
             <a:fld id="{4EC5E9F4-ABA9-7C48-8C55-E350C4AB4067}" type="datetimeFigureOut">
               <a:rPr lang="en-US" smtClean="0"/>
-              <a:t>2/13/17</a:t>
+              <a:t>2/27/17</a:t>
             </a:fld>
             <a:endParaRPr lang="en-US"/>
           </a:p>
@@ -637,11 +632,6 @@
         </p:txBody>
       </p:sp>
     </p:spTree>
-    <p:extLst>
-      <p:ext uri="{BB962C8B-B14F-4D97-AF65-F5344CB8AC3E}">
-        <p14:creationId xmlns:p14="http://schemas.microsoft.com/office/powerpoint/2010/main" val="1396666284"/>
-      </p:ext>
-    </p:extLst>
   </p:cSld>
   <p:clrMapOvr>
     <a:masterClrMapping/>
@@ -685,7 +675,7 @@
               <a:rPr lang="en-US" smtClean="0"/>
               <a:t>Click to edit Master title style</a:t>
             </a:r>
-            <a:endParaRPr lang="en-US"/>
+            <a:endParaRPr lang="en-US" dirty="0"/>
           </a:p>
         </p:txBody>
       </p:sp>
@@ -737,7 +727,7 @@
               <a:rPr lang="en-US" smtClean="0"/>
               <a:t>Fifth level</a:t>
             </a:r>
-            <a:endParaRPr lang="en-US"/>
+            <a:endParaRPr lang="en-US" dirty="0"/>
           </a:p>
         </p:txBody>
       </p:sp>
@@ -758,7 +748,7 @@
           <a:p>
             <a:fld id="{4EC5E9F4-ABA9-7C48-8C55-E350C4AB4067}" type="datetimeFigureOut">
               <a:rPr lang="en-US" smtClean="0"/>
-              <a:t>2/13/17</a:t>
+              <a:t>2/27/17</a:t>
             </a:fld>
             <a:endParaRPr lang="en-US"/>
           </a:p>
@@ -807,11 +797,6 @@
         </p:txBody>
       </p:sp>
     </p:spTree>
-    <p:extLst>
-      <p:ext uri="{BB962C8B-B14F-4D97-AF65-F5344CB8AC3E}">
-        <p14:creationId xmlns:p14="http://schemas.microsoft.com/office/powerpoint/2010/main" val="1308161377"/>
-      </p:ext>
-    </p:extLst>
   </p:cSld>
   <p:clrMapOvr>
     <a:masterClrMapping/>
@@ -848,8 +833,8 @@
         </p:nvSpPr>
         <p:spPr>
           <a:xfrm>
-            <a:off x="831850" y="1709738"/>
-            <a:ext cx="10515600" cy="2852737"/>
+            <a:off x="623888" y="1709739"/>
+            <a:ext cx="7886700" cy="2852737"/>
           </a:xfrm>
         </p:spPr>
         <p:txBody>
@@ -864,7 +849,7 @@
               <a:rPr lang="en-US" smtClean="0"/>
               <a:t>Click to edit Master title style</a:t>
             </a:r>
-            <a:endParaRPr lang="en-US"/>
+            <a:endParaRPr lang="en-US" dirty="0"/>
           </a:p>
         </p:txBody>
       </p:sp>
@@ -880,8 +865,8 @@
         </p:nvSpPr>
         <p:spPr>
           <a:xfrm>
-            <a:off x="831850" y="4589463"/>
-            <a:ext cx="10515600" cy="1500187"/>
+            <a:off x="623888" y="4589464"/>
+            <a:ext cx="7886700" cy="1500187"/>
           </a:xfrm>
         </p:spPr>
         <p:txBody>
@@ -891,9 +876,7 @@
               <a:buNone/>
               <a:defRPr sz="2400">
                 <a:solidFill>
-                  <a:schemeClr val="tx1">
-                    <a:tint val="75000"/>
-                  </a:schemeClr>
+                  <a:schemeClr val="tx1"/>
                 </a:solidFill>
               </a:defRPr>
             </a:lvl1pPr>
@@ -1004,7 +987,7 @@
           <a:p>
             <a:fld id="{4EC5E9F4-ABA9-7C48-8C55-E350C4AB4067}" type="datetimeFigureOut">
               <a:rPr lang="en-US" smtClean="0"/>
-              <a:t>2/13/17</a:t>
+              <a:t>2/27/17</a:t>
             </a:fld>
             <a:endParaRPr lang="en-US"/>
           </a:p>
@@ -1053,11 +1036,6 @@
         </p:txBody>
       </p:sp>
     </p:spTree>
-    <p:extLst>
-      <p:ext uri="{BB962C8B-B14F-4D97-AF65-F5344CB8AC3E}">
-        <p14:creationId xmlns:p14="http://schemas.microsoft.com/office/powerpoint/2010/main" val="330685253"/>
-      </p:ext>
-    </p:extLst>
   </p:cSld>
   <p:clrMapOvr>
     <a:masterClrMapping/>
@@ -1101,7 +1079,7 @@
               <a:rPr lang="en-US" smtClean="0"/>
               <a:t>Click to edit Master title style</a:t>
             </a:r>
-            <a:endParaRPr lang="en-US"/>
+            <a:endParaRPr lang="en-US" dirty="0"/>
           </a:p>
         </p:txBody>
       </p:sp>
@@ -1117,8 +1095,8 @@
         </p:nvSpPr>
         <p:spPr>
           <a:xfrm>
-            <a:off x="838200" y="1825625"/>
-            <a:ext cx="5181600" cy="4351338"/>
+            <a:off x="628650" y="1825625"/>
+            <a:ext cx="3886200" cy="4351338"/>
           </a:xfrm>
         </p:spPr>
         <p:txBody>
@@ -1158,7 +1136,7 @@
               <a:rPr lang="en-US" smtClean="0"/>
               <a:t>Fifth level</a:t>
             </a:r>
-            <a:endParaRPr lang="en-US"/>
+            <a:endParaRPr lang="en-US" dirty="0"/>
           </a:p>
         </p:txBody>
       </p:sp>
@@ -1174,8 +1152,8 @@
         </p:nvSpPr>
         <p:spPr>
           <a:xfrm>
-            <a:off x="6172200" y="1825625"/>
-            <a:ext cx="5181600" cy="4351338"/>
+            <a:off x="4629150" y="1825625"/>
+            <a:ext cx="3886200" cy="4351338"/>
           </a:xfrm>
         </p:spPr>
         <p:txBody>
@@ -1215,7 +1193,7 @@
               <a:rPr lang="en-US" smtClean="0"/>
               <a:t>Fifth level</a:t>
             </a:r>
-            <a:endParaRPr lang="en-US"/>
+            <a:endParaRPr lang="en-US" dirty="0"/>
           </a:p>
         </p:txBody>
       </p:sp>
@@ -1236,7 +1214,7 @@
           <a:p>
             <a:fld id="{4EC5E9F4-ABA9-7C48-8C55-E350C4AB4067}" type="datetimeFigureOut">
               <a:rPr lang="en-US" smtClean="0"/>
-              <a:t>2/13/17</a:t>
+              <a:t>2/27/17</a:t>
             </a:fld>
             <a:endParaRPr lang="en-US"/>
           </a:p>
@@ -1285,11 +1263,6 @@
         </p:txBody>
       </p:sp>
     </p:spTree>
-    <p:extLst>
-      <p:ext uri="{BB962C8B-B14F-4D97-AF65-F5344CB8AC3E}">
-        <p14:creationId xmlns:p14="http://schemas.microsoft.com/office/powerpoint/2010/main" val="139368735"/>
-      </p:ext>
-    </p:extLst>
   </p:cSld>
   <p:clrMapOvr>
     <a:masterClrMapping/>
@@ -1326,8 +1299,8 @@
         </p:nvSpPr>
         <p:spPr>
           <a:xfrm>
-            <a:off x="839788" y="365125"/>
-            <a:ext cx="10515600" cy="1325563"/>
+            <a:off x="629841" y="365126"/>
+            <a:ext cx="7886700" cy="1325563"/>
           </a:xfrm>
         </p:spPr>
         <p:txBody>
@@ -1338,7 +1311,7 @@
               <a:rPr lang="en-US" smtClean="0"/>
               <a:t>Click to edit Master title style</a:t>
             </a:r>
-            <a:endParaRPr lang="en-US"/>
+            <a:endParaRPr lang="en-US" dirty="0"/>
           </a:p>
         </p:txBody>
       </p:sp>
@@ -1354,8 +1327,8 @@
         </p:nvSpPr>
         <p:spPr>
           <a:xfrm>
-            <a:off x="839788" y="1681163"/>
-            <a:ext cx="5157787" cy="823912"/>
+            <a:off x="629842" y="1681163"/>
+            <a:ext cx="3868340" cy="823912"/>
           </a:xfrm>
         </p:spPr>
         <p:txBody>
@@ -1419,8 +1392,8 @@
         </p:nvSpPr>
         <p:spPr>
           <a:xfrm>
-            <a:off x="839788" y="2505075"/>
-            <a:ext cx="5157787" cy="3684588"/>
+            <a:off x="629842" y="2505075"/>
+            <a:ext cx="3868340" cy="3684588"/>
           </a:xfrm>
         </p:spPr>
         <p:txBody>
@@ -1460,7 +1433,7 @@
               <a:rPr lang="en-US" smtClean="0"/>
               <a:t>Fifth level</a:t>
             </a:r>
-            <a:endParaRPr lang="en-US"/>
+            <a:endParaRPr lang="en-US" dirty="0"/>
           </a:p>
         </p:txBody>
       </p:sp>
@@ -1476,8 +1449,8 @@
         </p:nvSpPr>
         <p:spPr>
           <a:xfrm>
-            <a:off x="6172200" y="1681163"/>
-            <a:ext cx="5183188" cy="823912"/>
+            <a:off x="4629150" y="1681163"/>
+            <a:ext cx="3887391" cy="823912"/>
           </a:xfrm>
         </p:spPr>
         <p:txBody>
@@ -1541,8 +1514,8 @@
         </p:nvSpPr>
         <p:spPr>
           <a:xfrm>
-            <a:off x="6172200" y="2505075"/>
-            <a:ext cx="5183188" cy="3684588"/>
+            <a:off x="4629150" y="2505075"/>
+            <a:ext cx="3887391" cy="3684588"/>
           </a:xfrm>
         </p:spPr>
         <p:txBody>
@@ -1582,7 +1555,7 @@
               <a:rPr lang="en-US" smtClean="0"/>
               <a:t>Fifth level</a:t>
             </a:r>
-            <a:endParaRPr lang="en-US"/>
+            <a:endParaRPr lang="en-US" dirty="0"/>
           </a:p>
         </p:txBody>
       </p:sp>
@@ -1603,7 +1576,7 @@
           <a:p>
             <a:fld id="{4EC5E9F4-ABA9-7C48-8C55-E350C4AB4067}" type="datetimeFigureOut">
               <a:rPr lang="en-US" smtClean="0"/>
-              <a:t>2/13/17</a:t>
+              <a:t>2/27/17</a:t>
             </a:fld>
             <a:endParaRPr lang="en-US"/>
           </a:p>
@@ -1652,11 +1625,6 @@
         </p:txBody>
       </p:sp>
     </p:spTree>
-    <p:extLst>
-      <p:ext uri="{BB962C8B-B14F-4D97-AF65-F5344CB8AC3E}">
-        <p14:creationId xmlns:p14="http://schemas.microsoft.com/office/powerpoint/2010/main" val="1613153915"/>
-      </p:ext>
-    </p:extLst>
   </p:cSld>
   <p:clrMapOvr>
     <a:masterClrMapping/>
@@ -1700,7 +1668,7 @@
               <a:rPr lang="en-US" smtClean="0"/>
               <a:t>Click to edit Master title style</a:t>
             </a:r>
-            <a:endParaRPr lang="en-US"/>
+            <a:endParaRPr lang="en-US" dirty="0"/>
           </a:p>
         </p:txBody>
       </p:sp>
@@ -1721,7 +1689,7 @@
           <a:p>
             <a:fld id="{4EC5E9F4-ABA9-7C48-8C55-E350C4AB4067}" type="datetimeFigureOut">
               <a:rPr lang="en-US" smtClean="0"/>
-              <a:t>2/13/17</a:t>
+              <a:t>2/27/17</a:t>
             </a:fld>
             <a:endParaRPr lang="en-US"/>
           </a:p>
@@ -1770,11 +1738,6 @@
         </p:txBody>
       </p:sp>
     </p:spTree>
-    <p:extLst>
-      <p:ext uri="{BB962C8B-B14F-4D97-AF65-F5344CB8AC3E}">
-        <p14:creationId xmlns:p14="http://schemas.microsoft.com/office/powerpoint/2010/main" val="296806030"/>
-      </p:ext>
-    </p:extLst>
   </p:cSld>
   <p:clrMapOvr>
     <a:masterClrMapping/>
@@ -1816,7 +1779,7 @@
           <a:p>
             <a:fld id="{4EC5E9F4-ABA9-7C48-8C55-E350C4AB4067}" type="datetimeFigureOut">
               <a:rPr lang="en-US" smtClean="0"/>
-              <a:t>2/13/17</a:t>
+              <a:t>2/27/17</a:t>
             </a:fld>
             <a:endParaRPr lang="en-US"/>
           </a:p>
@@ -1865,11 +1828,6 @@
         </p:txBody>
       </p:sp>
     </p:spTree>
-    <p:extLst>
-      <p:ext uri="{BB962C8B-B14F-4D97-AF65-F5344CB8AC3E}">
-        <p14:creationId xmlns:p14="http://schemas.microsoft.com/office/powerpoint/2010/main" val="1961917876"/>
-      </p:ext>
-    </p:extLst>
   </p:cSld>
   <p:clrMapOvr>
     <a:masterClrMapping/>
@@ -1906,8 +1864,8 @@
         </p:nvSpPr>
         <p:spPr>
           <a:xfrm>
-            <a:off x="839788" y="457200"/>
-            <a:ext cx="3932237" cy="1600200"/>
+            <a:off x="629841" y="457200"/>
+            <a:ext cx="2949178" cy="1600200"/>
           </a:xfrm>
         </p:spPr>
         <p:txBody>
@@ -1922,7 +1880,7 @@
               <a:rPr lang="en-US" smtClean="0"/>
               <a:t>Click to edit Master title style</a:t>
             </a:r>
-            <a:endParaRPr lang="en-US"/>
+            <a:endParaRPr lang="en-US" dirty="0"/>
           </a:p>
         </p:txBody>
       </p:sp>
@@ -1938,8 +1896,8 @@
         </p:nvSpPr>
         <p:spPr>
           <a:xfrm>
-            <a:off x="5183188" y="987425"/>
-            <a:ext cx="6172200" cy="4873625"/>
+            <a:off x="3887391" y="987426"/>
+            <a:ext cx="4629150" cy="4873625"/>
           </a:xfrm>
         </p:spPr>
         <p:txBody>
@@ -2007,7 +1965,7 @@
               <a:rPr lang="en-US" smtClean="0"/>
               <a:t>Fifth level</a:t>
             </a:r>
-            <a:endParaRPr lang="en-US"/>
+            <a:endParaRPr lang="en-US" dirty="0"/>
           </a:p>
         </p:txBody>
       </p:sp>
@@ -2023,8 +1981,8 @@
         </p:nvSpPr>
         <p:spPr>
           <a:xfrm>
-            <a:off x="839788" y="2057400"/>
-            <a:ext cx="3932237" cy="3811588"/>
+            <a:off x="629841" y="2057400"/>
+            <a:ext cx="2949178" cy="3811588"/>
           </a:xfrm>
         </p:spPr>
         <p:txBody>
@@ -2093,7 +2051,7 @@
           <a:p>
             <a:fld id="{4EC5E9F4-ABA9-7C48-8C55-E350C4AB4067}" type="datetimeFigureOut">
               <a:rPr lang="en-US" smtClean="0"/>
-              <a:t>2/13/17</a:t>
+              <a:t>2/27/17</a:t>
             </a:fld>
             <a:endParaRPr lang="en-US"/>
           </a:p>
@@ -2142,11 +2100,6 @@
         </p:txBody>
       </p:sp>
     </p:spTree>
-    <p:extLst>
-      <p:ext uri="{BB962C8B-B14F-4D97-AF65-F5344CB8AC3E}">
-        <p14:creationId xmlns:p14="http://schemas.microsoft.com/office/powerpoint/2010/main" val="1489825894"/>
-      </p:ext>
-    </p:extLst>
   </p:cSld>
   <p:clrMapOvr>
     <a:masterClrMapping/>
@@ -2183,8 +2136,8 @@
         </p:nvSpPr>
         <p:spPr>
           <a:xfrm>
-            <a:off x="839788" y="457200"/>
-            <a:ext cx="3932237" cy="1600200"/>
+            <a:off x="629841" y="457200"/>
+            <a:ext cx="2949178" cy="1600200"/>
           </a:xfrm>
         </p:spPr>
         <p:txBody>
@@ -2199,7 +2152,7 @@
               <a:rPr lang="en-US" smtClean="0"/>
               <a:t>Click to edit Master title style</a:t>
             </a:r>
-            <a:endParaRPr lang="en-US"/>
+            <a:endParaRPr lang="en-US" dirty="0"/>
           </a:p>
         </p:txBody>
       </p:sp>
@@ -2207,7 +2160,7 @@
         <p:nvSpPr>
           <p:cNvPr id="3" name="Picture Placeholder 2"/>
           <p:cNvSpPr>
-            <a:spLocks noGrp="1"/>
+            <a:spLocks noGrp="1" noChangeAspect="1"/>
           </p:cNvSpPr>
           <p:nvPr>
             <p:ph type="pic" idx="1"/>
@@ -2215,12 +2168,12 @@
         </p:nvSpPr>
         <p:spPr>
           <a:xfrm>
-            <a:off x="5183188" y="987425"/>
-            <a:ext cx="6172200" cy="4873625"/>
+            <a:off x="3887391" y="987426"/>
+            <a:ext cx="4629150" cy="4873625"/>
           </a:xfrm>
         </p:spPr>
         <p:txBody>
-          <a:bodyPr/>
+          <a:bodyPr anchor="t"/>
           <a:lstStyle>
             <a:lvl1pPr marL="0" indent="0">
               <a:buNone/>
@@ -2260,7 +2213,11 @@
             </a:lvl9pPr>
           </a:lstStyle>
           <a:p>
-            <a:endParaRPr lang="en-US"/>
+            <a:r>
+              <a:rPr lang="en-US" smtClean="0"/>
+              <a:t>Drag picture to placeholder or click icon to add</a:t>
+            </a:r>
+            <a:endParaRPr lang="en-US" dirty="0"/>
           </a:p>
         </p:txBody>
       </p:sp>
@@ -2276,8 +2233,8 @@
         </p:nvSpPr>
         <p:spPr>
           <a:xfrm>
-            <a:off x="839788" y="2057400"/>
-            <a:ext cx="3932237" cy="3811588"/>
+            <a:off x="629841" y="2057400"/>
+            <a:ext cx="2949178" cy="3811588"/>
           </a:xfrm>
         </p:spPr>
         <p:txBody>
@@ -2346,7 +2303,7 @@
           <a:p>
             <a:fld id="{4EC5E9F4-ABA9-7C48-8C55-E350C4AB4067}" type="datetimeFigureOut">
               <a:rPr lang="en-US" smtClean="0"/>
-              <a:t>2/13/17</a:t>
+              <a:t>2/27/17</a:t>
             </a:fld>
             <a:endParaRPr lang="en-US"/>
           </a:p>
@@ -2395,11 +2352,6 @@
         </p:txBody>
       </p:sp>
     </p:spTree>
-    <p:extLst>
-      <p:ext uri="{BB962C8B-B14F-4D97-AF65-F5344CB8AC3E}">
-        <p14:creationId xmlns:p14="http://schemas.microsoft.com/office/powerpoint/2010/main" val="1991960085"/>
-      </p:ext>
-    </p:extLst>
   </p:cSld>
   <p:clrMapOvr>
     <a:masterClrMapping/>
@@ -2441,8 +2393,8 @@
         </p:nvSpPr>
         <p:spPr>
           <a:xfrm>
-            <a:off x="838200" y="365125"/>
-            <a:ext cx="10515600" cy="1325563"/>
+            <a:off x="628650" y="365126"/>
+            <a:ext cx="7886700" cy="1325563"/>
           </a:xfrm>
           <a:prstGeom prst="rect">
             <a:avLst/>
@@ -2458,7 +2410,7 @@
               <a:rPr lang="en-US" smtClean="0"/>
               <a:t>Click to edit Master title style</a:t>
             </a:r>
-            <a:endParaRPr lang="en-US"/>
+            <a:endParaRPr lang="en-US" dirty="0"/>
           </a:p>
         </p:txBody>
       </p:sp>
@@ -2474,8 +2426,8 @@
         </p:nvSpPr>
         <p:spPr>
           <a:xfrm>
-            <a:off x="838200" y="1825625"/>
-            <a:ext cx="10515600" cy="4351338"/>
+            <a:off x="628650" y="1825625"/>
+            <a:ext cx="7886700" cy="4351338"/>
           </a:xfrm>
           <a:prstGeom prst="rect">
             <a:avLst/>
@@ -2520,7 +2472,7 @@
               <a:rPr lang="en-US" smtClean="0"/>
               <a:t>Fifth level</a:t>
             </a:r>
-            <a:endParaRPr lang="en-US"/>
+            <a:endParaRPr lang="en-US" dirty="0"/>
           </a:p>
         </p:txBody>
       </p:sp>
@@ -2536,8 +2488,8 @@
         </p:nvSpPr>
         <p:spPr>
           <a:xfrm>
-            <a:off x="838200" y="6356350"/>
-            <a:ext cx="2743200" cy="365125"/>
+            <a:off x="628650" y="6356351"/>
+            <a:ext cx="2057400" cy="365125"/>
           </a:xfrm>
           <a:prstGeom prst="rect">
             <a:avLst/>
@@ -2559,7 +2511,7 @@
           <a:p>
             <a:fld id="{4EC5E9F4-ABA9-7C48-8C55-E350C4AB4067}" type="datetimeFigureOut">
               <a:rPr lang="en-US" smtClean="0"/>
-              <a:t>2/13/17</a:t>
+              <a:t>2/27/17</a:t>
             </a:fld>
             <a:endParaRPr lang="en-US"/>
           </a:p>
@@ -2577,8 +2529,8 @@
         </p:nvSpPr>
         <p:spPr>
           <a:xfrm>
-            <a:off x="4038600" y="6356350"/>
-            <a:ext cx="4114800" cy="365125"/>
+            <a:off x="3028950" y="6356351"/>
+            <a:ext cx="3086100" cy="365125"/>
           </a:xfrm>
           <a:prstGeom prst="rect">
             <a:avLst/>
@@ -2614,8 +2566,8 @@
         </p:nvSpPr>
         <p:spPr>
           <a:xfrm>
-            <a:off x="8610600" y="6356350"/>
-            <a:ext cx="2743200" cy="365125"/>
+            <a:off x="6457950" y="6356351"/>
+            <a:ext cx="2057400" cy="365125"/>
           </a:xfrm>
           <a:prstGeom prst="rect">
             <a:avLst/>
@@ -2646,23 +2598,23 @@
     </p:spTree>
     <p:extLst>
       <p:ext uri="{BB962C8B-B14F-4D97-AF65-F5344CB8AC3E}">
-        <p14:creationId xmlns:p14="http://schemas.microsoft.com/office/powerpoint/2010/main" val="1818687276"/>
+        <p14:creationId xmlns:p14="http://schemas.microsoft.com/office/powerpoint/2010/main" val="831245717"/>
       </p:ext>
     </p:extLst>
   </p:cSld>
   <p:clrMap bg1="lt1" tx1="dk1" bg2="lt2" tx2="dk2" accent1="accent1" accent2="accent2" accent3="accent3" accent4="accent4" accent5="accent5" accent6="accent6" hlink="hlink" folHlink="folHlink"/>
   <p:sldLayoutIdLst>
-    <p:sldLayoutId id="2147483649" r:id="rId1"/>
-    <p:sldLayoutId id="2147483650" r:id="rId2"/>
-    <p:sldLayoutId id="2147483651" r:id="rId3"/>
-    <p:sldLayoutId id="2147483652" r:id="rId4"/>
-    <p:sldLayoutId id="2147483653" r:id="rId5"/>
-    <p:sldLayoutId id="2147483654" r:id="rId6"/>
-    <p:sldLayoutId id="2147483655" r:id="rId7"/>
-    <p:sldLayoutId id="2147483656" r:id="rId8"/>
-    <p:sldLayoutId id="2147483657" r:id="rId9"/>
-    <p:sldLayoutId id="2147483658" r:id="rId10"/>
-    <p:sldLayoutId id="2147483659" r:id="rId11"/>
+    <p:sldLayoutId id="2147483661" r:id="rId1"/>
+    <p:sldLayoutId id="2147483662" r:id="rId2"/>
+    <p:sldLayoutId id="2147483663" r:id="rId3"/>
+    <p:sldLayoutId id="2147483664" r:id="rId4"/>
+    <p:sldLayoutId id="2147483665" r:id="rId5"/>
+    <p:sldLayoutId id="2147483666" r:id="rId6"/>
+    <p:sldLayoutId id="2147483667" r:id="rId7"/>
+    <p:sldLayoutId id="2147483668" r:id="rId8"/>
+    <p:sldLayoutId id="2147483669" r:id="rId9"/>
+    <p:sldLayoutId id="2147483670" r:id="rId10"/>
+    <p:sldLayoutId id="2147483671" r:id="rId11"/>
   </p:sldLayoutIdLst>
   <p:txStyles>
     <p:titleStyle>
@@ -2692,7 +2644,7 @@
         <a:spcBef>
           <a:spcPts val="1000"/>
         </a:spcBef>
-        <a:buFont typeface="Arial"/>
+        <a:buFont typeface="Arial" panose="020B0604020202020204" pitchFamily="34" charset="0"/>
         <a:buChar char="•"/>
         <a:defRPr sz="2800" kern="1200">
           <a:solidFill>
@@ -2710,7 +2662,7 @@
         <a:spcBef>
           <a:spcPts val="500"/>
         </a:spcBef>
-        <a:buFont typeface="Arial"/>
+        <a:buFont typeface="Arial" panose="020B0604020202020204" pitchFamily="34" charset="0"/>
         <a:buChar char="•"/>
         <a:defRPr sz="2400" kern="1200">
           <a:solidFill>
@@ -2728,7 +2680,7 @@
         <a:spcBef>
           <a:spcPts val="500"/>
         </a:spcBef>
-        <a:buFont typeface="Arial"/>
+        <a:buFont typeface="Arial" panose="020B0604020202020204" pitchFamily="34" charset="0"/>
         <a:buChar char="•"/>
         <a:defRPr sz="2000" kern="1200">
           <a:solidFill>
@@ -2746,7 +2698,7 @@
         <a:spcBef>
           <a:spcPts val="500"/>
         </a:spcBef>
-        <a:buFont typeface="Arial"/>
+        <a:buFont typeface="Arial" panose="020B0604020202020204" pitchFamily="34" charset="0"/>
         <a:buChar char="•"/>
         <a:defRPr sz="1800" kern="1200">
           <a:solidFill>
@@ -2764,7 +2716,7 @@
         <a:spcBef>
           <a:spcPts val="500"/>
         </a:spcBef>
-        <a:buFont typeface="Arial"/>
+        <a:buFont typeface="Arial" panose="020B0604020202020204" pitchFamily="34" charset="0"/>
         <a:buChar char="•"/>
         <a:defRPr sz="1800" kern="1200">
           <a:solidFill>
@@ -2782,7 +2734,7 @@
         <a:spcBef>
           <a:spcPts val="500"/>
         </a:spcBef>
-        <a:buFont typeface="Arial"/>
+        <a:buFont typeface="Arial" panose="020B0604020202020204" pitchFamily="34" charset="0"/>
         <a:buChar char="•"/>
         <a:defRPr sz="1800" kern="1200">
           <a:solidFill>
@@ -2800,7 +2752,7 @@
         <a:spcBef>
           <a:spcPts val="500"/>
         </a:spcBef>
-        <a:buFont typeface="Arial"/>
+        <a:buFont typeface="Arial" panose="020B0604020202020204" pitchFamily="34" charset="0"/>
         <a:buChar char="•"/>
         <a:defRPr sz="1800" kern="1200">
           <a:solidFill>
@@ -2818,7 +2770,7 @@
         <a:spcBef>
           <a:spcPts val="500"/>
         </a:spcBef>
-        <a:buFont typeface="Arial"/>
+        <a:buFont typeface="Arial" panose="020B0604020202020204" pitchFamily="34" charset="0"/>
         <a:buChar char="•"/>
         <a:defRPr sz="1800" kern="1200">
           <a:solidFill>
@@ -2836,7 +2788,7 @@
         <a:spcBef>
           <a:spcPts val="500"/>
         </a:spcBef>
-        <a:buFont typeface="Arial"/>
+        <a:buFont typeface="Arial" panose="020B0604020202020204" pitchFamily="34" charset="0"/>
         <a:buChar char="•"/>
         <a:defRPr sz="1800" kern="1200">
           <a:solidFill>
@@ -3018,7 +2970,7 @@
 <file path=ppt/theme/theme1.xml><?xml version="1.0" encoding="utf-8"?>
 <a:theme xmlns:a="http://schemas.openxmlformats.org/drawingml/2006/main" name="Office Theme">
   <a:themeElements>
-    <a:clrScheme name="Office">
+    <a:clrScheme name="Office Theme">
       <a:dk1>
         <a:sysClr val="windowText" lastClr="000000"/>
       </a:dk1>
@@ -3056,14 +3008,14 @@
         <a:srgbClr val="954F72"/>
       </a:folHlink>
     </a:clrScheme>
-    <a:fontScheme name="Office">
+    <a:fontScheme name="Office Theme">
       <a:majorFont>
         <a:latin typeface="Calibri Light" panose="020F0302020204030204"/>
         <a:ea typeface=""/>
         <a:cs typeface=""/>
-        <a:font script="Jpan" typeface="Yu Gothic Light"/>
+        <a:font script="Jpan" typeface="游ゴシック Light"/>
         <a:font script="Hang" typeface="맑은 고딕"/>
-        <a:font script="Hans" typeface="DengXian Light"/>
+        <a:font script="Hans" typeface="等线 Light"/>
         <a:font script="Hant" typeface="新細明體"/>
         <a:font script="Arab" typeface="Times New Roman"/>
         <a:font script="Hebr" typeface="Times New Roman"/>
@@ -3096,9 +3048,9 @@
         <a:latin typeface="Calibri" panose="020F0502020204030204"/>
         <a:ea typeface=""/>
         <a:cs typeface=""/>
-        <a:font script="Jpan" typeface="Yu Gothic"/>
+        <a:font script="Jpan" typeface="游ゴシック"/>
         <a:font script="Hang" typeface="맑은 고딕"/>
-        <a:font script="Hans" typeface="DengXian"/>
+        <a:font script="Hans" typeface="等线"/>
         <a:font script="Hant" typeface="新細明體"/>
         <a:font script="Arab" typeface="Arial"/>
         <a:font script="Hebr" typeface="Arial"/>
@@ -3128,7 +3080,7 @@
         <a:font script="Geor" typeface="Sylfaen"/>
       </a:minorFont>
     </a:fontScheme>
-    <a:fmtScheme name="Office">
+    <a:fmtScheme name="Office Theme">
       <a:fillStyleLst>
         <a:solidFill>
           <a:schemeClr val="phClr"/>

--- a/samples/sample.pptx
+++ b/samples/sample.pptx
@@ -2,12 +2,12 @@
 <file path=ppt/presentation.xml><?xml version="1.0" encoding="utf-8"?>
 <p:presentation xmlns:a="http://schemas.openxmlformats.org/drawingml/2006/main" xmlns:r="http://schemas.openxmlformats.org/officeDocument/2006/relationships" xmlns:p="http://schemas.openxmlformats.org/presentationml/2006/main" saveSubsetFonts="1" autoCompressPictures="0">
   <p:sldMasterIdLst>
-    <p:sldMasterId id="2147483660" r:id="rId1"/>
+    <p:sldMasterId id="2147483648" r:id="rId1"/>
   </p:sldMasterIdLst>
   <p:sldIdLst>
     <p:sldId id="256" r:id="rId2"/>
   </p:sldIdLst>
-  <p:sldSz cx="9144000" cy="6858000" type="screen4x3"/>
+  <p:sldSz cx="12192000" cy="6858000"/>
   <p:notesSz cx="6858000" cy="9144000"/>
   <p:defaultTextStyle>
     <a:defPPr>
@@ -104,11 +104,6 @@
       </a:defRPr>
     </a:lvl9pPr>
   </p:defaultTextStyle>
-  <p:extLst>
-    <p:ext uri="{EFAFB233-063F-42B5-8137-9DF3F51BA10A}">
-      <p15:sldGuideLst xmlns:p15="http://schemas.microsoft.com/office/powerpoint/2012/main"/>
-    </p:ext>
-  </p:extLst>
 </p:presentation>
 </file>
 
@@ -131,7 +126,13 @@
       </p:grpSpPr>
       <p:sp>
         <p:nvSpPr>
-          <p:cNvPr id="2" name="Title 1"/>
+          <p:cNvPr id="2" name="Title 1">
+            <a:extLst>
+              <a:ext uri="{FF2B5EF4-FFF2-40B4-BE49-F238E27FC236}">
+                <a16:creationId xmlns:a16="http://schemas.microsoft.com/office/drawing/2014/main" id="{91ADE90B-F5F8-6F48-98E3-39BBC7406932}"/>
+              </a:ext>
+            </a:extLst>
+          </p:cNvPr>
           <p:cNvSpPr>
             <a:spLocks noGrp="1"/>
           </p:cNvSpPr>
@@ -141,8 +142,8 @@
         </p:nvSpPr>
         <p:spPr>
           <a:xfrm>
-            <a:off x="685800" y="1122363"/>
-            <a:ext cx="7772400" cy="2387600"/>
+            <a:off x="1524000" y="1122363"/>
+            <a:ext cx="9144000" cy="2387600"/>
           </a:xfrm>
         </p:spPr>
         <p:txBody>
@@ -154,16 +155,21 @@
           </a:lstStyle>
           <a:p>
             <a:r>
-              <a:rPr lang="en-US" smtClean="0"/>
+              <a:rPr lang="en-US"/>
               <a:t>Click to edit Master title style</a:t>
             </a:r>
-            <a:endParaRPr lang="en-US" dirty="0"/>
-          </a:p>
-        </p:txBody>
-      </p:sp>
-      <p:sp>
-        <p:nvSpPr>
-          <p:cNvPr id="3" name="Subtitle 2"/>
+          </a:p>
+        </p:txBody>
+      </p:sp>
+      <p:sp>
+        <p:nvSpPr>
+          <p:cNvPr id="3" name="Subtitle 2">
+            <a:extLst>
+              <a:ext uri="{FF2B5EF4-FFF2-40B4-BE49-F238E27FC236}">
+                <a16:creationId xmlns:a16="http://schemas.microsoft.com/office/drawing/2014/main" id="{6E64523A-6BD6-8A41-B343-99283D765EDE}"/>
+              </a:ext>
+            </a:extLst>
+          </p:cNvPr>
           <p:cNvSpPr>
             <a:spLocks noGrp="1"/>
           </p:cNvSpPr>
@@ -173,8 +179,8 @@
         </p:nvSpPr>
         <p:spPr>
           <a:xfrm>
-            <a:off x="1143000" y="3602038"/>
-            <a:ext cx="6858000" cy="1655762"/>
+            <a:off x="1524000" y="3602038"/>
+            <a:ext cx="9144000" cy="1655762"/>
           </a:xfrm>
         </p:spPr>
         <p:txBody>
@@ -219,31 +225,36 @@
           </a:lstStyle>
           <a:p>
             <a:r>
+              <a:rPr lang="en-US"/>
+              <a:t>Click to edit Master subtitle style</a:t>
+            </a:r>
+          </a:p>
+        </p:txBody>
+      </p:sp>
+      <p:sp>
+        <p:nvSpPr>
+          <p:cNvPr id="4" name="Date Placeholder 3">
+            <a:extLst>
+              <a:ext uri="{FF2B5EF4-FFF2-40B4-BE49-F238E27FC236}">
+                <a16:creationId xmlns:a16="http://schemas.microsoft.com/office/drawing/2014/main" id="{199753A3-9473-0F46-9DB1-BC217C078BBE}"/>
+              </a:ext>
+            </a:extLst>
+          </p:cNvPr>
+          <p:cNvSpPr>
+            <a:spLocks noGrp="1"/>
+          </p:cNvSpPr>
+          <p:nvPr>
+            <p:ph type="dt" sz="half" idx="10"/>
+          </p:nvPr>
+        </p:nvSpPr>
+        <p:spPr/>
+        <p:txBody>
+          <a:bodyPr/>
+          <a:lstStyle/>
+          <a:p>
+            <a:fld id="{0860687E-B7E5-B148-8852-963D599D2C81}" type="datetimeFigureOut">
               <a:rPr lang="en-US" smtClean="0"/>
-              <a:t>Click to edit Master subtitle style</a:t>
-            </a:r>
-            <a:endParaRPr lang="en-US" dirty="0"/>
-          </a:p>
-        </p:txBody>
-      </p:sp>
-      <p:sp>
-        <p:nvSpPr>
-          <p:cNvPr id="4" name="Date Placeholder 3"/>
-          <p:cNvSpPr>
-            <a:spLocks noGrp="1"/>
-          </p:cNvSpPr>
-          <p:nvPr>
-            <p:ph type="dt" sz="half" idx="10"/>
-          </p:nvPr>
-        </p:nvSpPr>
-        <p:spPr/>
-        <p:txBody>
-          <a:bodyPr/>
-          <a:lstStyle/>
-          <a:p>
-            <a:fld id="{4EC5E9F4-ABA9-7C48-8C55-E350C4AB4067}" type="datetimeFigureOut">
-              <a:rPr lang="en-US" smtClean="0"/>
-              <a:t>2/27/17</a:t>
+              <a:t>4/3/22</a:t>
             </a:fld>
             <a:endParaRPr lang="en-US"/>
           </a:p>
@@ -251,7 +262,13 @@
       </p:sp>
       <p:sp>
         <p:nvSpPr>
-          <p:cNvPr id="5" name="Footer Placeholder 4"/>
+          <p:cNvPr id="5" name="Footer Placeholder 4">
+            <a:extLst>
+              <a:ext uri="{FF2B5EF4-FFF2-40B4-BE49-F238E27FC236}">
+                <a16:creationId xmlns:a16="http://schemas.microsoft.com/office/drawing/2014/main" id="{4BD10CF9-3DF5-C74A-9566-B11B1649F7DE}"/>
+              </a:ext>
+            </a:extLst>
+          </p:cNvPr>
           <p:cNvSpPr>
             <a:spLocks noGrp="1"/>
           </p:cNvSpPr>
@@ -270,7 +287,13 @@
       </p:sp>
       <p:sp>
         <p:nvSpPr>
-          <p:cNvPr id="6" name="Slide Number Placeholder 5"/>
+          <p:cNvPr id="6" name="Slide Number Placeholder 5">
+            <a:extLst>
+              <a:ext uri="{FF2B5EF4-FFF2-40B4-BE49-F238E27FC236}">
+                <a16:creationId xmlns:a16="http://schemas.microsoft.com/office/drawing/2014/main" id="{C93C1894-E39D-7842-9DC2-3DCF86086734}"/>
+              </a:ext>
+            </a:extLst>
+          </p:cNvPr>
           <p:cNvSpPr>
             <a:spLocks noGrp="1"/>
           </p:cNvSpPr>
@@ -283,7 +306,7 @@
           <a:bodyPr/>
           <a:lstStyle/>
           <a:p>
-            <a:fld id="{C4BFC18F-573E-BC4B-9AA3-3EE86C20F1B5}" type="slidenum">
+            <a:fld id="{0809AB4E-5D06-5F4F-A150-12ECC82B436C}" type="slidenum">
               <a:rPr lang="en-US" smtClean="0"/>
               <a:t>‹#›</a:t>
             </a:fld>
@@ -292,6 +315,11 @@
         </p:txBody>
       </p:sp>
     </p:spTree>
+    <p:extLst>
+      <p:ext uri="{BB962C8B-B14F-4D97-AF65-F5344CB8AC3E}">
+        <p14:creationId xmlns:p14="http://schemas.microsoft.com/office/powerpoint/2010/main" val="1559433202"/>
+      </p:ext>
+    </p:extLst>
   </p:cSld>
   <p:clrMapOvr>
     <a:masterClrMapping/>
@@ -318,7 +346,13 @@
       </p:grpSpPr>
       <p:sp>
         <p:nvSpPr>
-          <p:cNvPr id="2" name="Title 1"/>
+          <p:cNvPr id="2" name="Title 1">
+            <a:extLst>
+              <a:ext uri="{FF2B5EF4-FFF2-40B4-BE49-F238E27FC236}">
+                <a16:creationId xmlns:a16="http://schemas.microsoft.com/office/drawing/2014/main" id="{31FF04DF-B56D-A348-B0EC-F61D477D1BF5}"/>
+              </a:ext>
+            </a:extLst>
+          </p:cNvPr>
           <p:cNvSpPr>
             <a:spLocks noGrp="1"/>
           </p:cNvSpPr>
@@ -332,83 +366,93 @@
           <a:lstStyle/>
           <a:p>
             <a:r>
+              <a:rPr lang="en-US"/>
+              <a:t>Click to edit Master title style</a:t>
+            </a:r>
+          </a:p>
+        </p:txBody>
+      </p:sp>
+      <p:sp>
+        <p:nvSpPr>
+          <p:cNvPr id="3" name="Vertical Text Placeholder 2">
+            <a:extLst>
+              <a:ext uri="{FF2B5EF4-FFF2-40B4-BE49-F238E27FC236}">
+                <a16:creationId xmlns:a16="http://schemas.microsoft.com/office/drawing/2014/main" id="{EB48729F-E7CE-D34D-A9CE-B81645F16B2F}"/>
+              </a:ext>
+            </a:extLst>
+          </p:cNvPr>
+          <p:cNvSpPr>
+            <a:spLocks noGrp="1"/>
+          </p:cNvSpPr>
+          <p:nvPr>
+            <p:ph type="body" orient="vert" idx="1"/>
+          </p:nvPr>
+        </p:nvSpPr>
+        <p:spPr/>
+        <p:txBody>
+          <a:bodyPr vert="eaVert"/>
+          <a:lstStyle/>
+          <a:p>
+            <a:pPr lvl="0"/>
+            <a:r>
+              <a:rPr lang="en-US"/>
+              <a:t>Click to edit Master text styles</a:t>
+            </a:r>
+          </a:p>
+          <a:p>
+            <a:pPr lvl="1"/>
+            <a:r>
+              <a:rPr lang="en-US"/>
+              <a:t>Second level</a:t>
+            </a:r>
+          </a:p>
+          <a:p>
+            <a:pPr lvl="2"/>
+            <a:r>
+              <a:rPr lang="en-US"/>
+              <a:t>Third level</a:t>
+            </a:r>
+          </a:p>
+          <a:p>
+            <a:pPr lvl="3"/>
+            <a:r>
+              <a:rPr lang="en-US"/>
+              <a:t>Fourth level</a:t>
+            </a:r>
+          </a:p>
+          <a:p>
+            <a:pPr lvl="4"/>
+            <a:r>
+              <a:rPr lang="en-US"/>
+              <a:t>Fifth level</a:t>
+            </a:r>
+          </a:p>
+        </p:txBody>
+      </p:sp>
+      <p:sp>
+        <p:nvSpPr>
+          <p:cNvPr id="4" name="Date Placeholder 3">
+            <a:extLst>
+              <a:ext uri="{FF2B5EF4-FFF2-40B4-BE49-F238E27FC236}">
+                <a16:creationId xmlns:a16="http://schemas.microsoft.com/office/drawing/2014/main" id="{30754581-EEE6-C04B-8AAF-8E92FA5E30B0}"/>
+              </a:ext>
+            </a:extLst>
+          </p:cNvPr>
+          <p:cNvSpPr>
+            <a:spLocks noGrp="1"/>
+          </p:cNvSpPr>
+          <p:nvPr>
+            <p:ph type="dt" sz="half" idx="10"/>
+          </p:nvPr>
+        </p:nvSpPr>
+        <p:spPr/>
+        <p:txBody>
+          <a:bodyPr/>
+          <a:lstStyle/>
+          <a:p>
+            <a:fld id="{0860687E-B7E5-B148-8852-963D599D2C81}" type="datetimeFigureOut">
               <a:rPr lang="en-US" smtClean="0"/>
-              <a:t>Click to edit Master title style</a:t>
-            </a:r>
-            <a:endParaRPr lang="en-US" dirty="0"/>
-          </a:p>
-        </p:txBody>
-      </p:sp>
-      <p:sp>
-        <p:nvSpPr>
-          <p:cNvPr id="3" name="Vertical Text Placeholder 2"/>
-          <p:cNvSpPr>
-            <a:spLocks noGrp="1"/>
-          </p:cNvSpPr>
-          <p:nvPr>
-            <p:ph type="body" orient="vert" idx="1"/>
-          </p:nvPr>
-        </p:nvSpPr>
-        <p:spPr/>
-        <p:txBody>
-          <a:bodyPr vert="eaVert"/>
-          <a:lstStyle/>
-          <a:p>
-            <a:pPr lvl="0"/>
-            <a:r>
-              <a:rPr lang="en-US" smtClean="0"/>
-              <a:t>Click to edit Master text styles</a:t>
-            </a:r>
-          </a:p>
-          <a:p>
-            <a:pPr lvl="1"/>
-            <a:r>
-              <a:rPr lang="en-US" smtClean="0"/>
-              <a:t>Second level</a:t>
-            </a:r>
-          </a:p>
-          <a:p>
-            <a:pPr lvl="2"/>
-            <a:r>
-              <a:rPr lang="en-US" smtClean="0"/>
-              <a:t>Third level</a:t>
-            </a:r>
-          </a:p>
-          <a:p>
-            <a:pPr lvl="3"/>
-            <a:r>
-              <a:rPr lang="en-US" smtClean="0"/>
-              <a:t>Fourth level</a:t>
-            </a:r>
-          </a:p>
-          <a:p>
-            <a:pPr lvl="4"/>
-            <a:r>
-              <a:rPr lang="en-US" smtClean="0"/>
-              <a:t>Fifth level</a:t>
-            </a:r>
-            <a:endParaRPr lang="en-US" dirty="0"/>
-          </a:p>
-        </p:txBody>
-      </p:sp>
-      <p:sp>
-        <p:nvSpPr>
-          <p:cNvPr id="4" name="Date Placeholder 3"/>
-          <p:cNvSpPr>
-            <a:spLocks noGrp="1"/>
-          </p:cNvSpPr>
-          <p:nvPr>
-            <p:ph type="dt" sz="half" idx="10"/>
-          </p:nvPr>
-        </p:nvSpPr>
-        <p:spPr/>
-        <p:txBody>
-          <a:bodyPr/>
-          <a:lstStyle/>
-          <a:p>
-            <a:fld id="{4EC5E9F4-ABA9-7C48-8C55-E350C4AB4067}" type="datetimeFigureOut">
-              <a:rPr lang="en-US" smtClean="0"/>
-              <a:t>2/27/17</a:t>
+              <a:t>4/3/22</a:t>
             </a:fld>
             <a:endParaRPr lang="en-US"/>
           </a:p>
@@ -416,7 +460,13 @@
       </p:sp>
       <p:sp>
         <p:nvSpPr>
-          <p:cNvPr id="5" name="Footer Placeholder 4"/>
+          <p:cNvPr id="5" name="Footer Placeholder 4">
+            <a:extLst>
+              <a:ext uri="{FF2B5EF4-FFF2-40B4-BE49-F238E27FC236}">
+                <a16:creationId xmlns:a16="http://schemas.microsoft.com/office/drawing/2014/main" id="{0F9E40B6-572C-9A48-9A96-1D214A202700}"/>
+              </a:ext>
+            </a:extLst>
+          </p:cNvPr>
           <p:cNvSpPr>
             <a:spLocks noGrp="1"/>
           </p:cNvSpPr>
@@ -435,7 +485,13 @@
       </p:sp>
       <p:sp>
         <p:nvSpPr>
-          <p:cNvPr id="6" name="Slide Number Placeholder 5"/>
+          <p:cNvPr id="6" name="Slide Number Placeholder 5">
+            <a:extLst>
+              <a:ext uri="{FF2B5EF4-FFF2-40B4-BE49-F238E27FC236}">
+                <a16:creationId xmlns:a16="http://schemas.microsoft.com/office/drawing/2014/main" id="{3F873B8E-CEDD-2D42-A867-39D14978DECF}"/>
+              </a:ext>
+            </a:extLst>
+          </p:cNvPr>
           <p:cNvSpPr>
             <a:spLocks noGrp="1"/>
           </p:cNvSpPr>
@@ -448,7 +504,7 @@
           <a:bodyPr/>
           <a:lstStyle/>
           <a:p>
-            <a:fld id="{C4BFC18F-573E-BC4B-9AA3-3EE86C20F1B5}" type="slidenum">
+            <a:fld id="{0809AB4E-5D06-5F4F-A150-12ECC82B436C}" type="slidenum">
               <a:rPr lang="en-US" smtClean="0"/>
               <a:t>‹#›</a:t>
             </a:fld>
@@ -457,6 +513,11 @@
         </p:txBody>
       </p:sp>
     </p:spTree>
+    <p:extLst>
+      <p:ext uri="{BB962C8B-B14F-4D97-AF65-F5344CB8AC3E}">
+        <p14:creationId xmlns:p14="http://schemas.microsoft.com/office/powerpoint/2010/main" val="3249873922"/>
+      </p:ext>
+    </p:extLst>
   </p:cSld>
   <p:clrMapOvr>
     <a:masterClrMapping/>
@@ -483,7 +544,13 @@
       </p:grpSpPr>
       <p:sp>
         <p:nvSpPr>
-          <p:cNvPr id="2" name="Vertical Title 1"/>
+          <p:cNvPr id="2" name="Vertical Title 1">
+            <a:extLst>
+              <a:ext uri="{FF2B5EF4-FFF2-40B4-BE49-F238E27FC236}">
+                <a16:creationId xmlns:a16="http://schemas.microsoft.com/office/drawing/2014/main" id="{C4CB6857-743D-3245-ACC5-54FADFC354DF}"/>
+              </a:ext>
+            </a:extLst>
+          </p:cNvPr>
           <p:cNvSpPr>
             <a:spLocks noGrp="1"/>
           </p:cNvSpPr>
@@ -493,8 +560,8 @@
         </p:nvSpPr>
         <p:spPr>
           <a:xfrm>
-            <a:off x="6543675" y="365125"/>
-            <a:ext cx="1971675" cy="5811838"/>
+            <a:off x="8724900" y="365125"/>
+            <a:ext cx="2628900" cy="5811838"/>
           </a:xfrm>
         </p:spPr>
         <p:txBody>
@@ -502,16 +569,21 @@
           <a:lstStyle/>
           <a:p>
             <a:r>
-              <a:rPr lang="en-US" smtClean="0"/>
+              <a:rPr lang="en-US"/>
               <a:t>Click to edit Master title style</a:t>
             </a:r>
-            <a:endParaRPr lang="en-US" dirty="0"/>
-          </a:p>
-        </p:txBody>
-      </p:sp>
-      <p:sp>
-        <p:nvSpPr>
-          <p:cNvPr id="3" name="Vertical Text Placeholder 2"/>
+          </a:p>
+        </p:txBody>
+      </p:sp>
+      <p:sp>
+        <p:nvSpPr>
+          <p:cNvPr id="3" name="Vertical Text Placeholder 2">
+            <a:extLst>
+              <a:ext uri="{FF2B5EF4-FFF2-40B4-BE49-F238E27FC236}">
+                <a16:creationId xmlns:a16="http://schemas.microsoft.com/office/drawing/2014/main" id="{22FC349F-03CA-884F-9BD5-18595F690D30}"/>
+              </a:ext>
+            </a:extLst>
+          </p:cNvPr>
           <p:cNvSpPr>
             <a:spLocks noGrp="1"/>
           </p:cNvSpPr>
@@ -521,8 +593,8 @@
         </p:nvSpPr>
         <p:spPr>
           <a:xfrm>
-            <a:off x="628650" y="365125"/>
-            <a:ext cx="5800725" cy="5811838"/>
+            <a:off x="838200" y="365125"/>
+            <a:ext cx="7734300" cy="5811838"/>
           </a:xfrm>
         </p:spPr>
         <p:txBody>
@@ -531,59 +603,64 @@
           <a:p>
             <a:pPr lvl="0"/>
             <a:r>
+              <a:rPr lang="en-US"/>
+              <a:t>Click to edit Master text styles</a:t>
+            </a:r>
+          </a:p>
+          <a:p>
+            <a:pPr lvl="1"/>
+            <a:r>
+              <a:rPr lang="en-US"/>
+              <a:t>Second level</a:t>
+            </a:r>
+          </a:p>
+          <a:p>
+            <a:pPr lvl="2"/>
+            <a:r>
+              <a:rPr lang="en-US"/>
+              <a:t>Third level</a:t>
+            </a:r>
+          </a:p>
+          <a:p>
+            <a:pPr lvl="3"/>
+            <a:r>
+              <a:rPr lang="en-US"/>
+              <a:t>Fourth level</a:t>
+            </a:r>
+          </a:p>
+          <a:p>
+            <a:pPr lvl="4"/>
+            <a:r>
+              <a:rPr lang="en-US"/>
+              <a:t>Fifth level</a:t>
+            </a:r>
+          </a:p>
+        </p:txBody>
+      </p:sp>
+      <p:sp>
+        <p:nvSpPr>
+          <p:cNvPr id="4" name="Date Placeholder 3">
+            <a:extLst>
+              <a:ext uri="{FF2B5EF4-FFF2-40B4-BE49-F238E27FC236}">
+                <a16:creationId xmlns:a16="http://schemas.microsoft.com/office/drawing/2014/main" id="{B5956FD9-58AC-EB4B-9BE8-47600B3388BE}"/>
+              </a:ext>
+            </a:extLst>
+          </p:cNvPr>
+          <p:cNvSpPr>
+            <a:spLocks noGrp="1"/>
+          </p:cNvSpPr>
+          <p:nvPr>
+            <p:ph type="dt" sz="half" idx="10"/>
+          </p:nvPr>
+        </p:nvSpPr>
+        <p:spPr/>
+        <p:txBody>
+          <a:bodyPr/>
+          <a:lstStyle/>
+          <a:p>
+            <a:fld id="{0860687E-B7E5-B148-8852-963D599D2C81}" type="datetimeFigureOut">
               <a:rPr lang="en-US" smtClean="0"/>
-              <a:t>Click to edit Master text styles</a:t>
-            </a:r>
-          </a:p>
-          <a:p>
-            <a:pPr lvl="1"/>
-            <a:r>
-              <a:rPr lang="en-US" smtClean="0"/>
-              <a:t>Second level</a:t>
-            </a:r>
-          </a:p>
-          <a:p>
-            <a:pPr lvl="2"/>
-            <a:r>
-              <a:rPr lang="en-US" smtClean="0"/>
-              <a:t>Third level</a:t>
-            </a:r>
-          </a:p>
-          <a:p>
-            <a:pPr lvl="3"/>
-            <a:r>
-              <a:rPr lang="en-US" smtClean="0"/>
-              <a:t>Fourth level</a:t>
-            </a:r>
-          </a:p>
-          <a:p>
-            <a:pPr lvl="4"/>
-            <a:r>
-              <a:rPr lang="en-US" smtClean="0"/>
-              <a:t>Fifth level</a:t>
-            </a:r>
-            <a:endParaRPr lang="en-US" dirty="0"/>
-          </a:p>
-        </p:txBody>
-      </p:sp>
-      <p:sp>
-        <p:nvSpPr>
-          <p:cNvPr id="4" name="Date Placeholder 3"/>
-          <p:cNvSpPr>
-            <a:spLocks noGrp="1"/>
-          </p:cNvSpPr>
-          <p:nvPr>
-            <p:ph type="dt" sz="half" idx="10"/>
-          </p:nvPr>
-        </p:nvSpPr>
-        <p:spPr/>
-        <p:txBody>
-          <a:bodyPr/>
-          <a:lstStyle/>
-          <a:p>
-            <a:fld id="{4EC5E9F4-ABA9-7C48-8C55-E350C4AB4067}" type="datetimeFigureOut">
-              <a:rPr lang="en-US" smtClean="0"/>
-              <a:t>2/27/17</a:t>
+              <a:t>4/3/22</a:t>
             </a:fld>
             <a:endParaRPr lang="en-US"/>
           </a:p>
@@ -591,7 +668,13 @@
       </p:sp>
       <p:sp>
         <p:nvSpPr>
-          <p:cNvPr id="5" name="Footer Placeholder 4"/>
+          <p:cNvPr id="5" name="Footer Placeholder 4">
+            <a:extLst>
+              <a:ext uri="{FF2B5EF4-FFF2-40B4-BE49-F238E27FC236}">
+                <a16:creationId xmlns:a16="http://schemas.microsoft.com/office/drawing/2014/main" id="{CF2144E3-84AB-2B4A-9C84-F33D3E1D6ABD}"/>
+              </a:ext>
+            </a:extLst>
+          </p:cNvPr>
           <p:cNvSpPr>
             <a:spLocks noGrp="1"/>
           </p:cNvSpPr>
@@ -610,7 +693,13 @@
       </p:sp>
       <p:sp>
         <p:nvSpPr>
-          <p:cNvPr id="6" name="Slide Number Placeholder 5"/>
+          <p:cNvPr id="6" name="Slide Number Placeholder 5">
+            <a:extLst>
+              <a:ext uri="{FF2B5EF4-FFF2-40B4-BE49-F238E27FC236}">
+                <a16:creationId xmlns:a16="http://schemas.microsoft.com/office/drawing/2014/main" id="{F522B461-8095-D34A-AEE2-57DC411FD9AE}"/>
+              </a:ext>
+            </a:extLst>
+          </p:cNvPr>
           <p:cNvSpPr>
             <a:spLocks noGrp="1"/>
           </p:cNvSpPr>
@@ -623,7 +712,7 @@
           <a:bodyPr/>
           <a:lstStyle/>
           <a:p>
-            <a:fld id="{C4BFC18F-573E-BC4B-9AA3-3EE86C20F1B5}" type="slidenum">
+            <a:fld id="{0809AB4E-5D06-5F4F-A150-12ECC82B436C}" type="slidenum">
               <a:rPr lang="en-US" smtClean="0"/>
               <a:t>‹#›</a:t>
             </a:fld>
@@ -632,6 +721,11 @@
         </p:txBody>
       </p:sp>
     </p:spTree>
+    <p:extLst>
+      <p:ext uri="{BB962C8B-B14F-4D97-AF65-F5344CB8AC3E}">
+        <p14:creationId xmlns:p14="http://schemas.microsoft.com/office/powerpoint/2010/main" val="1538820530"/>
+      </p:ext>
+    </p:extLst>
   </p:cSld>
   <p:clrMapOvr>
     <a:masterClrMapping/>
@@ -658,7 +752,13 @@
       </p:grpSpPr>
       <p:sp>
         <p:nvSpPr>
-          <p:cNvPr id="2" name="Title 1"/>
+          <p:cNvPr id="2" name="Title 1">
+            <a:extLst>
+              <a:ext uri="{FF2B5EF4-FFF2-40B4-BE49-F238E27FC236}">
+                <a16:creationId xmlns:a16="http://schemas.microsoft.com/office/drawing/2014/main" id="{B150DE7D-106D-FC40-858A-ECB180DECC4F}"/>
+              </a:ext>
+            </a:extLst>
+          </p:cNvPr>
           <p:cNvSpPr>
             <a:spLocks noGrp="1"/>
           </p:cNvSpPr>
@@ -672,83 +772,93 @@
           <a:lstStyle/>
           <a:p>
             <a:r>
+              <a:rPr lang="en-US"/>
+              <a:t>Click to edit Master title style</a:t>
+            </a:r>
+          </a:p>
+        </p:txBody>
+      </p:sp>
+      <p:sp>
+        <p:nvSpPr>
+          <p:cNvPr id="3" name="Content Placeholder 2">
+            <a:extLst>
+              <a:ext uri="{FF2B5EF4-FFF2-40B4-BE49-F238E27FC236}">
+                <a16:creationId xmlns:a16="http://schemas.microsoft.com/office/drawing/2014/main" id="{FB13F609-AE21-7744-9078-0F25675412BE}"/>
+              </a:ext>
+            </a:extLst>
+          </p:cNvPr>
+          <p:cNvSpPr>
+            <a:spLocks noGrp="1"/>
+          </p:cNvSpPr>
+          <p:nvPr>
+            <p:ph idx="1"/>
+          </p:nvPr>
+        </p:nvSpPr>
+        <p:spPr/>
+        <p:txBody>
+          <a:bodyPr/>
+          <a:lstStyle/>
+          <a:p>
+            <a:pPr lvl="0"/>
+            <a:r>
+              <a:rPr lang="en-US"/>
+              <a:t>Click to edit Master text styles</a:t>
+            </a:r>
+          </a:p>
+          <a:p>
+            <a:pPr lvl="1"/>
+            <a:r>
+              <a:rPr lang="en-US"/>
+              <a:t>Second level</a:t>
+            </a:r>
+          </a:p>
+          <a:p>
+            <a:pPr lvl="2"/>
+            <a:r>
+              <a:rPr lang="en-US"/>
+              <a:t>Third level</a:t>
+            </a:r>
+          </a:p>
+          <a:p>
+            <a:pPr lvl="3"/>
+            <a:r>
+              <a:rPr lang="en-US"/>
+              <a:t>Fourth level</a:t>
+            </a:r>
+          </a:p>
+          <a:p>
+            <a:pPr lvl="4"/>
+            <a:r>
+              <a:rPr lang="en-US"/>
+              <a:t>Fifth level</a:t>
+            </a:r>
+          </a:p>
+        </p:txBody>
+      </p:sp>
+      <p:sp>
+        <p:nvSpPr>
+          <p:cNvPr id="4" name="Date Placeholder 3">
+            <a:extLst>
+              <a:ext uri="{FF2B5EF4-FFF2-40B4-BE49-F238E27FC236}">
+                <a16:creationId xmlns:a16="http://schemas.microsoft.com/office/drawing/2014/main" id="{3711D502-15B2-9E48-A8E2-279CF014FFD3}"/>
+              </a:ext>
+            </a:extLst>
+          </p:cNvPr>
+          <p:cNvSpPr>
+            <a:spLocks noGrp="1"/>
+          </p:cNvSpPr>
+          <p:nvPr>
+            <p:ph type="dt" sz="half" idx="10"/>
+          </p:nvPr>
+        </p:nvSpPr>
+        <p:spPr/>
+        <p:txBody>
+          <a:bodyPr/>
+          <a:lstStyle/>
+          <a:p>
+            <a:fld id="{0860687E-B7E5-B148-8852-963D599D2C81}" type="datetimeFigureOut">
               <a:rPr lang="en-US" smtClean="0"/>
-              <a:t>Click to edit Master title style</a:t>
-            </a:r>
-            <a:endParaRPr lang="en-US" dirty="0"/>
-          </a:p>
-        </p:txBody>
-      </p:sp>
-      <p:sp>
-        <p:nvSpPr>
-          <p:cNvPr id="3" name="Content Placeholder 2"/>
-          <p:cNvSpPr>
-            <a:spLocks noGrp="1"/>
-          </p:cNvSpPr>
-          <p:nvPr>
-            <p:ph idx="1"/>
-          </p:nvPr>
-        </p:nvSpPr>
-        <p:spPr/>
-        <p:txBody>
-          <a:bodyPr/>
-          <a:lstStyle/>
-          <a:p>
-            <a:pPr lvl="0"/>
-            <a:r>
-              <a:rPr lang="en-US" smtClean="0"/>
-              <a:t>Click to edit Master text styles</a:t>
-            </a:r>
-          </a:p>
-          <a:p>
-            <a:pPr lvl="1"/>
-            <a:r>
-              <a:rPr lang="en-US" smtClean="0"/>
-              <a:t>Second level</a:t>
-            </a:r>
-          </a:p>
-          <a:p>
-            <a:pPr lvl="2"/>
-            <a:r>
-              <a:rPr lang="en-US" smtClean="0"/>
-              <a:t>Third level</a:t>
-            </a:r>
-          </a:p>
-          <a:p>
-            <a:pPr lvl="3"/>
-            <a:r>
-              <a:rPr lang="en-US" smtClean="0"/>
-              <a:t>Fourth level</a:t>
-            </a:r>
-          </a:p>
-          <a:p>
-            <a:pPr lvl="4"/>
-            <a:r>
-              <a:rPr lang="en-US" smtClean="0"/>
-              <a:t>Fifth level</a:t>
-            </a:r>
-            <a:endParaRPr lang="en-US" dirty="0"/>
-          </a:p>
-        </p:txBody>
-      </p:sp>
-      <p:sp>
-        <p:nvSpPr>
-          <p:cNvPr id="4" name="Date Placeholder 3"/>
-          <p:cNvSpPr>
-            <a:spLocks noGrp="1"/>
-          </p:cNvSpPr>
-          <p:nvPr>
-            <p:ph type="dt" sz="half" idx="10"/>
-          </p:nvPr>
-        </p:nvSpPr>
-        <p:spPr/>
-        <p:txBody>
-          <a:bodyPr/>
-          <a:lstStyle/>
-          <a:p>
-            <a:fld id="{4EC5E9F4-ABA9-7C48-8C55-E350C4AB4067}" type="datetimeFigureOut">
-              <a:rPr lang="en-US" smtClean="0"/>
-              <a:t>2/27/17</a:t>
+              <a:t>4/3/22</a:t>
             </a:fld>
             <a:endParaRPr lang="en-US"/>
           </a:p>
@@ -756,7 +866,13 @@
       </p:sp>
       <p:sp>
         <p:nvSpPr>
-          <p:cNvPr id="5" name="Footer Placeholder 4"/>
+          <p:cNvPr id="5" name="Footer Placeholder 4">
+            <a:extLst>
+              <a:ext uri="{FF2B5EF4-FFF2-40B4-BE49-F238E27FC236}">
+                <a16:creationId xmlns:a16="http://schemas.microsoft.com/office/drawing/2014/main" id="{55F21521-8BB1-A349-B4A2-6BA8826D51E6}"/>
+              </a:ext>
+            </a:extLst>
+          </p:cNvPr>
           <p:cNvSpPr>
             <a:spLocks noGrp="1"/>
           </p:cNvSpPr>
@@ -775,7 +891,13 @@
       </p:sp>
       <p:sp>
         <p:nvSpPr>
-          <p:cNvPr id="6" name="Slide Number Placeholder 5"/>
+          <p:cNvPr id="6" name="Slide Number Placeholder 5">
+            <a:extLst>
+              <a:ext uri="{FF2B5EF4-FFF2-40B4-BE49-F238E27FC236}">
+                <a16:creationId xmlns:a16="http://schemas.microsoft.com/office/drawing/2014/main" id="{4D63F3A5-DCBC-9F41-8A79-8EE2CFD808C3}"/>
+              </a:ext>
+            </a:extLst>
+          </p:cNvPr>
           <p:cNvSpPr>
             <a:spLocks noGrp="1"/>
           </p:cNvSpPr>
@@ -788,7 +910,7 @@
           <a:bodyPr/>
           <a:lstStyle/>
           <a:p>
-            <a:fld id="{C4BFC18F-573E-BC4B-9AA3-3EE86C20F1B5}" type="slidenum">
+            <a:fld id="{0809AB4E-5D06-5F4F-A150-12ECC82B436C}" type="slidenum">
               <a:rPr lang="en-US" smtClean="0"/>
               <a:t>‹#›</a:t>
             </a:fld>
@@ -797,6 +919,11 @@
         </p:txBody>
       </p:sp>
     </p:spTree>
+    <p:extLst>
+      <p:ext uri="{BB962C8B-B14F-4D97-AF65-F5344CB8AC3E}">
+        <p14:creationId xmlns:p14="http://schemas.microsoft.com/office/powerpoint/2010/main" val="2957759960"/>
+      </p:ext>
+    </p:extLst>
   </p:cSld>
   <p:clrMapOvr>
     <a:masterClrMapping/>
@@ -823,7 +950,13 @@
       </p:grpSpPr>
       <p:sp>
         <p:nvSpPr>
-          <p:cNvPr id="2" name="Title 1"/>
+          <p:cNvPr id="2" name="Title 1">
+            <a:extLst>
+              <a:ext uri="{FF2B5EF4-FFF2-40B4-BE49-F238E27FC236}">
+                <a16:creationId xmlns:a16="http://schemas.microsoft.com/office/drawing/2014/main" id="{8051FA96-B028-3341-9977-3E421C06D81A}"/>
+              </a:ext>
+            </a:extLst>
+          </p:cNvPr>
           <p:cNvSpPr>
             <a:spLocks noGrp="1"/>
           </p:cNvSpPr>
@@ -833,8 +966,8 @@
         </p:nvSpPr>
         <p:spPr>
           <a:xfrm>
-            <a:off x="623888" y="1709739"/>
-            <a:ext cx="7886700" cy="2852737"/>
+            <a:off x="831850" y="1709738"/>
+            <a:ext cx="10515600" cy="2852737"/>
           </a:xfrm>
         </p:spPr>
         <p:txBody>
@@ -846,16 +979,21 @@
           </a:lstStyle>
           <a:p>
             <a:r>
-              <a:rPr lang="en-US" smtClean="0"/>
+              <a:rPr lang="en-US"/>
               <a:t>Click to edit Master title style</a:t>
             </a:r>
-            <a:endParaRPr lang="en-US" dirty="0"/>
-          </a:p>
-        </p:txBody>
-      </p:sp>
-      <p:sp>
-        <p:nvSpPr>
-          <p:cNvPr id="3" name="Text Placeholder 2"/>
+          </a:p>
+        </p:txBody>
+      </p:sp>
+      <p:sp>
+        <p:nvSpPr>
+          <p:cNvPr id="3" name="Text Placeholder 2">
+            <a:extLst>
+              <a:ext uri="{FF2B5EF4-FFF2-40B4-BE49-F238E27FC236}">
+                <a16:creationId xmlns:a16="http://schemas.microsoft.com/office/drawing/2014/main" id="{21FF755C-F55B-B54A-A9AC-BC4A73700218}"/>
+              </a:ext>
+            </a:extLst>
+          </p:cNvPr>
           <p:cNvSpPr>
             <a:spLocks noGrp="1"/>
           </p:cNvSpPr>
@@ -865,8 +1003,8 @@
         </p:nvSpPr>
         <p:spPr>
           <a:xfrm>
-            <a:off x="623888" y="4589464"/>
-            <a:ext cx="7886700" cy="1500187"/>
+            <a:off x="831850" y="4589463"/>
+            <a:ext cx="10515600" cy="1500187"/>
           </a:xfrm>
         </p:spPr>
         <p:txBody>
@@ -876,7 +1014,9 @@
               <a:buNone/>
               <a:defRPr sz="2400">
                 <a:solidFill>
-                  <a:schemeClr val="tx1"/>
+                  <a:schemeClr val="tx1">
+                    <a:tint val="75000"/>
+                  </a:schemeClr>
                 </a:solidFill>
               </a:defRPr>
             </a:lvl1pPr>
@@ -964,30 +1104,36 @@
           <a:p>
             <a:pPr lvl="0"/>
             <a:r>
+              <a:rPr lang="en-US"/>
+              <a:t>Click to edit Master text styles</a:t>
+            </a:r>
+          </a:p>
+        </p:txBody>
+      </p:sp>
+      <p:sp>
+        <p:nvSpPr>
+          <p:cNvPr id="4" name="Date Placeholder 3">
+            <a:extLst>
+              <a:ext uri="{FF2B5EF4-FFF2-40B4-BE49-F238E27FC236}">
+                <a16:creationId xmlns:a16="http://schemas.microsoft.com/office/drawing/2014/main" id="{C324DD6F-05B6-414B-A4B0-20DB73341142}"/>
+              </a:ext>
+            </a:extLst>
+          </p:cNvPr>
+          <p:cNvSpPr>
+            <a:spLocks noGrp="1"/>
+          </p:cNvSpPr>
+          <p:nvPr>
+            <p:ph type="dt" sz="half" idx="10"/>
+          </p:nvPr>
+        </p:nvSpPr>
+        <p:spPr/>
+        <p:txBody>
+          <a:bodyPr/>
+          <a:lstStyle/>
+          <a:p>
+            <a:fld id="{0860687E-B7E5-B148-8852-963D599D2C81}" type="datetimeFigureOut">
               <a:rPr lang="en-US" smtClean="0"/>
-              <a:t>Click to edit Master text styles</a:t>
-            </a:r>
-          </a:p>
-        </p:txBody>
-      </p:sp>
-      <p:sp>
-        <p:nvSpPr>
-          <p:cNvPr id="4" name="Date Placeholder 3"/>
-          <p:cNvSpPr>
-            <a:spLocks noGrp="1"/>
-          </p:cNvSpPr>
-          <p:nvPr>
-            <p:ph type="dt" sz="half" idx="10"/>
-          </p:nvPr>
-        </p:nvSpPr>
-        <p:spPr/>
-        <p:txBody>
-          <a:bodyPr/>
-          <a:lstStyle/>
-          <a:p>
-            <a:fld id="{4EC5E9F4-ABA9-7C48-8C55-E350C4AB4067}" type="datetimeFigureOut">
-              <a:rPr lang="en-US" smtClean="0"/>
-              <a:t>2/27/17</a:t>
+              <a:t>4/3/22</a:t>
             </a:fld>
             <a:endParaRPr lang="en-US"/>
           </a:p>
@@ -995,7 +1141,13 @@
       </p:sp>
       <p:sp>
         <p:nvSpPr>
-          <p:cNvPr id="5" name="Footer Placeholder 4"/>
+          <p:cNvPr id="5" name="Footer Placeholder 4">
+            <a:extLst>
+              <a:ext uri="{FF2B5EF4-FFF2-40B4-BE49-F238E27FC236}">
+                <a16:creationId xmlns:a16="http://schemas.microsoft.com/office/drawing/2014/main" id="{5ABC6579-D04D-5A48-8ACE-6F6A4F23B2C3}"/>
+              </a:ext>
+            </a:extLst>
+          </p:cNvPr>
           <p:cNvSpPr>
             <a:spLocks noGrp="1"/>
           </p:cNvSpPr>
@@ -1014,7 +1166,13 @@
       </p:sp>
       <p:sp>
         <p:nvSpPr>
-          <p:cNvPr id="6" name="Slide Number Placeholder 5"/>
+          <p:cNvPr id="6" name="Slide Number Placeholder 5">
+            <a:extLst>
+              <a:ext uri="{FF2B5EF4-FFF2-40B4-BE49-F238E27FC236}">
+                <a16:creationId xmlns:a16="http://schemas.microsoft.com/office/drawing/2014/main" id="{D94CAE18-7A5F-234D-B47E-A31499E3FD1E}"/>
+              </a:ext>
+            </a:extLst>
+          </p:cNvPr>
           <p:cNvSpPr>
             <a:spLocks noGrp="1"/>
           </p:cNvSpPr>
@@ -1027,7 +1185,7 @@
           <a:bodyPr/>
           <a:lstStyle/>
           <a:p>
-            <a:fld id="{C4BFC18F-573E-BC4B-9AA3-3EE86C20F1B5}" type="slidenum">
+            <a:fld id="{0809AB4E-5D06-5F4F-A150-12ECC82B436C}" type="slidenum">
               <a:rPr lang="en-US" smtClean="0"/>
               <a:t>‹#›</a:t>
             </a:fld>
@@ -1036,6 +1194,11 @@
         </p:txBody>
       </p:sp>
     </p:spTree>
+    <p:extLst>
+      <p:ext uri="{BB962C8B-B14F-4D97-AF65-F5344CB8AC3E}">
+        <p14:creationId xmlns:p14="http://schemas.microsoft.com/office/powerpoint/2010/main" val="4005445161"/>
+      </p:ext>
+    </p:extLst>
   </p:cSld>
   <p:clrMapOvr>
     <a:masterClrMapping/>
@@ -1062,7 +1225,13 @@
       </p:grpSpPr>
       <p:sp>
         <p:nvSpPr>
-          <p:cNvPr id="2" name="Title 1"/>
+          <p:cNvPr id="2" name="Title 1">
+            <a:extLst>
+              <a:ext uri="{FF2B5EF4-FFF2-40B4-BE49-F238E27FC236}">
+                <a16:creationId xmlns:a16="http://schemas.microsoft.com/office/drawing/2014/main" id="{DAC6C2AC-117F-5146-98B6-FDB657ADEBBF}"/>
+              </a:ext>
+            </a:extLst>
+          </p:cNvPr>
           <p:cNvSpPr>
             <a:spLocks noGrp="1"/>
           </p:cNvSpPr>
@@ -1076,16 +1245,21 @@
           <a:lstStyle/>
           <a:p>
             <a:r>
-              <a:rPr lang="en-US" smtClean="0"/>
+              <a:rPr lang="en-US"/>
               <a:t>Click to edit Master title style</a:t>
             </a:r>
-            <a:endParaRPr lang="en-US" dirty="0"/>
-          </a:p>
-        </p:txBody>
-      </p:sp>
-      <p:sp>
-        <p:nvSpPr>
-          <p:cNvPr id="3" name="Content Placeholder 2"/>
+          </a:p>
+        </p:txBody>
+      </p:sp>
+      <p:sp>
+        <p:nvSpPr>
+          <p:cNvPr id="3" name="Content Placeholder 2">
+            <a:extLst>
+              <a:ext uri="{FF2B5EF4-FFF2-40B4-BE49-F238E27FC236}">
+                <a16:creationId xmlns:a16="http://schemas.microsoft.com/office/drawing/2014/main" id="{3EC60810-7454-0A4D-BCEA-AA4B53996F62}"/>
+              </a:ext>
+            </a:extLst>
+          </p:cNvPr>
           <p:cNvSpPr>
             <a:spLocks noGrp="1"/>
           </p:cNvSpPr>
@@ -1095,8 +1269,8 @@
         </p:nvSpPr>
         <p:spPr>
           <a:xfrm>
-            <a:off x="628650" y="1825625"/>
-            <a:ext cx="3886200" cy="4351338"/>
+            <a:off x="838200" y="1825625"/>
+            <a:ext cx="5181600" cy="4351338"/>
           </a:xfrm>
         </p:spPr>
         <p:txBody>
@@ -1105,44 +1279,49 @@
           <a:p>
             <a:pPr lvl="0"/>
             <a:r>
-              <a:rPr lang="en-US" smtClean="0"/>
+              <a:rPr lang="en-US"/>
               <a:t>Click to edit Master text styles</a:t>
             </a:r>
           </a:p>
           <a:p>
             <a:pPr lvl="1"/>
             <a:r>
-              <a:rPr lang="en-US" smtClean="0"/>
+              <a:rPr lang="en-US"/>
               <a:t>Second level</a:t>
             </a:r>
           </a:p>
           <a:p>
             <a:pPr lvl="2"/>
             <a:r>
-              <a:rPr lang="en-US" smtClean="0"/>
+              <a:rPr lang="en-US"/>
               <a:t>Third level</a:t>
             </a:r>
           </a:p>
           <a:p>
             <a:pPr lvl="3"/>
             <a:r>
-              <a:rPr lang="en-US" smtClean="0"/>
+              <a:rPr lang="en-US"/>
               <a:t>Fourth level</a:t>
             </a:r>
           </a:p>
           <a:p>
             <a:pPr lvl="4"/>
             <a:r>
-              <a:rPr lang="en-US" smtClean="0"/>
+              <a:rPr lang="en-US"/>
               <a:t>Fifth level</a:t>
             </a:r>
-            <a:endParaRPr lang="en-US" dirty="0"/>
-          </a:p>
-        </p:txBody>
-      </p:sp>
-      <p:sp>
-        <p:nvSpPr>
-          <p:cNvPr id="4" name="Content Placeholder 3"/>
+          </a:p>
+        </p:txBody>
+      </p:sp>
+      <p:sp>
+        <p:nvSpPr>
+          <p:cNvPr id="4" name="Content Placeholder 3">
+            <a:extLst>
+              <a:ext uri="{FF2B5EF4-FFF2-40B4-BE49-F238E27FC236}">
+                <a16:creationId xmlns:a16="http://schemas.microsoft.com/office/drawing/2014/main" id="{88073529-46F8-F14F-98BE-256DCA6CE1E5}"/>
+              </a:ext>
+            </a:extLst>
+          </p:cNvPr>
           <p:cNvSpPr>
             <a:spLocks noGrp="1"/>
           </p:cNvSpPr>
@@ -1152,8 +1331,8 @@
         </p:nvSpPr>
         <p:spPr>
           <a:xfrm>
-            <a:off x="4629150" y="1825625"/>
-            <a:ext cx="3886200" cy="4351338"/>
+            <a:off x="6172200" y="1825625"/>
+            <a:ext cx="5181600" cy="4351338"/>
           </a:xfrm>
         </p:spPr>
         <p:txBody>
@@ -1162,59 +1341,64 @@
           <a:p>
             <a:pPr lvl="0"/>
             <a:r>
+              <a:rPr lang="en-US"/>
+              <a:t>Click to edit Master text styles</a:t>
+            </a:r>
+          </a:p>
+          <a:p>
+            <a:pPr lvl="1"/>
+            <a:r>
+              <a:rPr lang="en-US"/>
+              <a:t>Second level</a:t>
+            </a:r>
+          </a:p>
+          <a:p>
+            <a:pPr lvl="2"/>
+            <a:r>
+              <a:rPr lang="en-US"/>
+              <a:t>Third level</a:t>
+            </a:r>
+          </a:p>
+          <a:p>
+            <a:pPr lvl="3"/>
+            <a:r>
+              <a:rPr lang="en-US"/>
+              <a:t>Fourth level</a:t>
+            </a:r>
+          </a:p>
+          <a:p>
+            <a:pPr lvl="4"/>
+            <a:r>
+              <a:rPr lang="en-US"/>
+              <a:t>Fifth level</a:t>
+            </a:r>
+          </a:p>
+        </p:txBody>
+      </p:sp>
+      <p:sp>
+        <p:nvSpPr>
+          <p:cNvPr id="5" name="Date Placeholder 4">
+            <a:extLst>
+              <a:ext uri="{FF2B5EF4-FFF2-40B4-BE49-F238E27FC236}">
+                <a16:creationId xmlns:a16="http://schemas.microsoft.com/office/drawing/2014/main" id="{BF51FA93-BC06-7549-9E3D-32E63A6AB23D}"/>
+              </a:ext>
+            </a:extLst>
+          </p:cNvPr>
+          <p:cNvSpPr>
+            <a:spLocks noGrp="1"/>
+          </p:cNvSpPr>
+          <p:nvPr>
+            <p:ph type="dt" sz="half" idx="10"/>
+          </p:nvPr>
+        </p:nvSpPr>
+        <p:spPr/>
+        <p:txBody>
+          <a:bodyPr/>
+          <a:lstStyle/>
+          <a:p>
+            <a:fld id="{0860687E-B7E5-B148-8852-963D599D2C81}" type="datetimeFigureOut">
               <a:rPr lang="en-US" smtClean="0"/>
-              <a:t>Click to edit Master text styles</a:t>
-            </a:r>
-          </a:p>
-          <a:p>
-            <a:pPr lvl="1"/>
-            <a:r>
-              <a:rPr lang="en-US" smtClean="0"/>
-              <a:t>Second level</a:t>
-            </a:r>
-          </a:p>
-          <a:p>
-            <a:pPr lvl="2"/>
-            <a:r>
-              <a:rPr lang="en-US" smtClean="0"/>
-              <a:t>Third level</a:t>
-            </a:r>
-          </a:p>
-          <a:p>
-            <a:pPr lvl="3"/>
-            <a:r>
-              <a:rPr lang="en-US" smtClean="0"/>
-              <a:t>Fourth level</a:t>
-            </a:r>
-          </a:p>
-          <a:p>
-            <a:pPr lvl="4"/>
-            <a:r>
-              <a:rPr lang="en-US" smtClean="0"/>
-              <a:t>Fifth level</a:t>
-            </a:r>
-            <a:endParaRPr lang="en-US" dirty="0"/>
-          </a:p>
-        </p:txBody>
-      </p:sp>
-      <p:sp>
-        <p:nvSpPr>
-          <p:cNvPr id="5" name="Date Placeholder 4"/>
-          <p:cNvSpPr>
-            <a:spLocks noGrp="1"/>
-          </p:cNvSpPr>
-          <p:nvPr>
-            <p:ph type="dt" sz="half" idx="10"/>
-          </p:nvPr>
-        </p:nvSpPr>
-        <p:spPr/>
-        <p:txBody>
-          <a:bodyPr/>
-          <a:lstStyle/>
-          <a:p>
-            <a:fld id="{4EC5E9F4-ABA9-7C48-8C55-E350C4AB4067}" type="datetimeFigureOut">
-              <a:rPr lang="en-US" smtClean="0"/>
-              <a:t>2/27/17</a:t>
+              <a:t>4/3/22</a:t>
             </a:fld>
             <a:endParaRPr lang="en-US"/>
           </a:p>
@@ -1222,7 +1406,13 @@
       </p:sp>
       <p:sp>
         <p:nvSpPr>
-          <p:cNvPr id="6" name="Footer Placeholder 5"/>
+          <p:cNvPr id="6" name="Footer Placeholder 5">
+            <a:extLst>
+              <a:ext uri="{FF2B5EF4-FFF2-40B4-BE49-F238E27FC236}">
+                <a16:creationId xmlns:a16="http://schemas.microsoft.com/office/drawing/2014/main" id="{B7F616D4-1C9A-2447-AB0D-7C258511881F}"/>
+              </a:ext>
+            </a:extLst>
+          </p:cNvPr>
           <p:cNvSpPr>
             <a:spLocks noGrp="1"/>
           </p:cNvSpPr>
@@ -1241,7 +1431,13 @@
       </p:sp>
       <p:sp>
         <p:nvSpPr>
-          <p:cNvPr id="7" name="Slide Number Placeholder 6"/>
+          <p:cNvPr id="7" name="Slide Number Placeholder 6">
+            <a:extLst>
+              <a:ext uri="{FF2B5EF4-FFF2-40B4-BE49-F238E27FC236}">
+                <a16:creationId xmlns:a16="http://schemas.microsoft.com/office/drawing/2014/main" id="{D3C4D1C6-E51F-2A4F-8688-9B661A39ED9E}"/>
+              </a:ext>
+            </a:extLst>
+          </p:cNvPr>
           <p:cNvSpPr>
             <a:spLocks noGrp="1"/>
           </p:cNvSpPr>
@@ -1254,7 +1450,7 @@
           <a:bodyPr/>
           <a:lstStyle/>
           <a:p>
-            <a:fld id="{C4BFC18F-573E-BC4B-9AA3-3EE86C20F1B5}" type="slidenum">
+            <a:fld id="{0809AB4E-5D06-5F4F-A150-12ECC82B436C}" type="slidenum">
               <a:rPr lang="en-US" smtClean="0"/>
               <a:t>‹#›</a:t>
             </a:fld>
@@ -1263,6 +1459,11 @@
         </p:txBody>
       </p:sp>
     </p:spTree>
+    <p:extLst>
+      <p:ext uri="{BB962C8B-B14F-4D97-AF65-F5344CB8AC3E}">
+        <p14:creationId xmlns:p14="http://schemas.microsoft.com/office/powerpoint/2010/main" val="4244485113"/>
+      </p:ext>
+    </p:extLst>
   </p:cSld>
   <p:clrMapOvr>
     <a:masterClrMapping/>
@@ -1289,7 +1490,13 @@
       </p:grpSpPr>
       <p:sp>
         <p:nvSpPr>
-          <p:cNvPr id="2" name="Title 1"/>
+          <p:cNvPr id="2" name="Title 1">
+            <a:extLst>
+              <a:ext uri="{FF2B5EF4-FFF2-40B4-BE49-F238E27FC236}">
+                <a16:creationId xmlns:a16="http://schemas.microsoft.com/office/drawing/2014/main" id="{F4B9CCB4-5A00-0344-A6AD-638B05A24574}"/>
+              </a:ext>
+            </a:extLst>
+          </p:cNvPr>
           <p:cNvSpPr>
             <a:spLocks noGrp="1"/>
           </p:cNvSpPr>
@@ -1299,8 +1506,8 @@
         </p:nvSpPr>
         <p:spPr>
           <a:xfrm>
-            <a:off x="629841" y="365126"/>
-            <a:ext cx="7886700" cy="1325563"/>
+            <a:off x="839788" y="365125"/>
+            <a:ext cx="10515600" cy="1325563"/>
           </a:xfrm>
         </p:spPr>
         <p:txBody>
@@ -1308,16 +1515,21 @@
           <a:lstStyle/>
           <a:p>
             <a:r>
-              <a:rPr lang="en-US" smtClean="0"/>
+              <a:rPr lang="en-US"/>
               <a:t>Click to edit Master title style</a:t>
             </a:r>
-            <a:endParaRPr lang="en-US" dirty="0"/>
-          </a:p>
-        </p:txBody>
-      </p:sp>
-      <p:sp>
-        <p:nvSpPr>
-          <p:cNvPr id="3" name="Text Placeholder 2"/>
+          </a:p>
+        </p:txBody>
+      </p:sp>
+      <p:sp>
+        <p:nvSpPr>
+          <p:cNvPr id="3" name="Text Placeholder 2">
+            <a:extLst>
+              <a:ext uri="{FF2B5EF4-FFF2-40B4-BE49-F238E27FC236}">
+                <a16:creationId xmlns:a16="http://schemas.microsoft.com/office/drawing/2014/main" id="{EB6F0591-6F6B-CB4E-BCA9-468497A8C64F}"/>
+              </a:ext>
+            </a:extLst>
+          </p:cNvPr>
           <p:cNvSpPr>
             <a:spLocks noGrp="1"/>
           </p:cNvSpPr>
@@ -1327,8 +1539,8 @@
         </p:nvSpPr>
         <p:spPr>
           <a:xfrm>
-            <a:off x="629842" y="1681163"/>
-            <a:ext cx="3868340" cy="823912"/>
+            <a:off x="839788" y="1681163"/>
+            <a:ext cx="5157787" cy="823912"/>
           </a:xfrm>
         </p:spPr>
         <p:txBody>
@@ -1374,7 +1586,7 @@
           <a:p>
             <a:pPr lvl="0"/>
             <a:r>
-              <a:rPr lang="en-US" smtClean="0"/>
+              <a:rPr lang="en-US"/>
               <a:t>Click to edit Master text styles</a:t>
             </a:r>
           </a:p>
@@ -1382,7 +1594,13 @@
       </p:sp>
       <p:sp>
         <p:nvSpPr>
-          <p:cNvPr id="4" name="Content Placeholder 3"/>
+          <p:cNvPr id="4" name="Content Placeholder 3">
+            <a:extLst>
+              <a:ext uri="{FF2B5EF4-FFF2-40B4-BE49-F238E27FC236}">
+                <a16:creationId xmlns:a16="http://schemas.microsoft.com/office/drawing/2014/main" id="{8D1DFE5D-400B-294E-BE2A-AEE92466043F}"/>
+              </a:ext>
+            </a:extLst>
+          </p:cNvPr>
           <p:cNvSpPr>
             <a:spLocks noGrp="1"/>
           </p:cNvSpPr>
@@ -1392,8 +1610,8 @@
         </p:nvSpPr>
         <p:spPr>
           <a:xfrm>
-            <a:off x="629842" y="2505075"/>
-            <a:ext cx="3868340" cy="3684588"/>
+            <a:off x="839788" y="2505075"/>
+            <a:ext cx="5157787" cy="3684588"/>
           </a:xfrm>
         </p:spPr>
         <p:txBody>
@@ -1402,44 +1620,49 @@
           <a:p>
             <a:pPr lvl="0"/>
             <a:r>
-              <a:rPr lang="en-US" smtClean="0"/>
+              <a:rPr lang="en-US"/>
               <a:t>Click to edit Master text styles</a:t>
             </a:r>
           </a:p>
           <a:p>
             <a:pPr lvl="1"/>
             <a:r>
-              <a:rPr lang="en-US" smtClean="0"/>
+              <a:rPr lang="en-US"/>
               <a:t>Second level</a:t>
             </a:r>
           </a:p>
           <a:p>
             <a:pPr lvl="2"/>
             <a:r>
-              <a:rPr lang="en-US" smtClean="0"/>
+              <a:rPr lang="en-US"/>
               <a:t>Third level</a:t>
             </a:r>
           </a:p>
           <a:p>
             <a:pPr lvl="3"/>
             <a:r>
-              <a:rPr lang="en-US" smtClean="0"/>
+              <a:rPr lang="en-US"/>
               <a:t>Fourth level</a:t>
             </a:r>
           </a:p>
           <a:p>
             <a:pPr lvl="4"/>
             <a:r>
-              <a:rPr lang="en-US" smtClean="0"/>
+              <a:rPr lang="en-US"/>
               <a:t>Fifth level</a:t>
             </a:r>
-            <a:endParaRPr lang="en-US" dirty="0"/>
-          </a:p>
-        </p:txBody>
-      </p:sp>
-      <p:sp>
-        <p:nvSpPr>
-          <p:cNvPr id="5" name="Text Placeholder 4"/>
+          </a:p>
+        </p:txBody>
+      </p:sp>
+      <p:sp>
+        <p:nvSpPr>
+          <p:cNvPr id="5" name="Text Placeholder 4">
+            <a:extLst>
+              <a:ext uri="{FF2B5EF4-FFF2-40B4-BE49-F238E27FC236}">
+                <a16:creationId xmlns:a16="http://schemas.microsoft.com/office/drawing/2014/main" id="{A5CDD830-236B-A14B-9013-506B6019E161}"/>
+              </a:ext>
+            </a:extLst>
+          </p:cNvPr>
           <p:cNvSpPr>
             <a:spLocks noGrp="1"/>
           </p:cNvSpPr>
@@ -1449,8 +1672,8 @@
         </p:nvSpPr>
         <p:spPr>
           <a:xfrm>
-            <a:off x="4629150" y="1681163"/>
-            <a:ext cx="3887391" cy="823912"/>
+            <a:off x="6172200" y="1681163"/>
+            <a:ext cx="5183188" cy="823912"/>
           </a:xfrm>
         </p:spPr>
         <p:txBody>
@@ -1496,7 +1719,7 @@
           <a:p>
             <a:pPr lvl="0"/>
             <a:r>
-              <a:rPr lang="en-US" smtClean="0"/>
+              <a:rPr lang="en-US"/>
               <a:t>Click to edit Master text styles</a:t>
             </a:r>
           </a:p>
@@ -1504,7 +1727,13 @@
       </p:sp>
       <p:sp>
         <p:nvSpPr>
-          <p:cNvPr id="6" name="Content Placeholder 5"/>
+          <p:cNvPr id="6" name="Content Placeholder 5">
+            <a:extLst>
+              <a:ext uri="{FF2B5EF4-FFF2-40B4-BE49-F238E27FC236}">
+                <a16:creationId xmlns:a16="http://schemas.microsoft.com/office/drawing/2014/main" id="{C02B9E76-6138-D945-9B3E-C8E95F776D05}"/>
+              </a:ext>
+            </a:extLst>
+          </p:cNvPr>
           <p:cNvSpPr>
             <a:spLocks noGrp="1"/>
           </p:cNvSpPr>
@@ -1514,8 +1743,8 @@
         </p:nvSpPr>
         <p:spPr>
           <a:xfrm>
-            <a:off x="4629150" y="2505075"/>
-            <a:ext cx="3887391" cy="3684588"/>
+            <a:off x="6172200" y="2505075"/>
+            <a:ext cx="5183188" cy="3684588"/>
           </a:xfrm>
         </p:spPr>
         <p:txBody>
@@ -1524,59 +1753,64 @@
           <a:p>
             <a:pPr lvl="0"/>
             <a:r>
+              <a:rPr lang="en-US"/>
+              <a:t>Click to edit Master text styles</a:t>
+            </a:r>
+          </a:p>
+          <a:p>
+            <a:pPr lvl="1"/>
+            <a:r>
+              <a:rPr lang="en-US"/>
+              <a:t>Second level</a:t>
+            </a:r>
+          </a:p>
+          <a:p>
+            <a:pPr lvl="2"/>
+            <a:r>
+              <a:rPr lang="en-US"/>
+              <a:t>Third level</a:t>
+            </a:r>
+          </a:p>
+          <a:p>
+            <a:pPr lvl="3"/>
+            <a:r>
+              <a:rPr lang="en-US"/>
+              <a:t>Fourth level</a:t>
+            </a:r>
+          </a:p>
+          <a:p>
+            <a:pPr lvl="4"/>
+            <a:r>
+              <a:rPr lang="en-US"/>
+              <a:t>Fifth level</a:t>
+            </a:r>
+          </a:p>
+        </p:txBody>
+      </p:sp>
+      <p:sp>
+        <p:nvSpPr>
+          <p:cNvPr id="7" name="Date Placeholder 6">
+            <a:extLst>
+              <a:ext uri="{FF2B5EF4-FFF2-40B4-BE49-F238E27FC236}">
+                <a16:creationId xmlns:a16="http://schemas.microsoft.com/office/drawing/2014/main" id="{07DEEDEB-0DF6-A943-91A8-9E8A92D5AB3B}"/>
+              </a:ext>
+            </a:extLst>
+          </p:cNvPr>
+          <p:cNvSpPr>
+            <a:spLocks noGrp="1"/>
+          </p:cNvSpPr>
+          <p:nvPr>
+            <p:ph type="dt" sz="half" idx="10"/>
+          </p:nvPr>
+        </p:nvSpPr>
+        <p:spPr/>
+        <p:txBody>
+          <a:bodyPr/>
+          <a:lstStyle/>
+          <a:p>
+            <a:fld id="{0860687E-B7E5-B148-8852-963D599D2C81}" type="datetimeFigureOut">
               <a:rPr lang="en-US" smtClean="0"/>
-              <a:t>Click to edit Master text styles</a:t>
-            </a:r>
-          </a:p>
-          <a:p>
-            <a:pPr lvl="1"/>
-            <a:r>
-              <a:rPr lang="en-US" smtClean="0"/>
-              <a:t>Second level</a:t>
-            </a:r>
-          </a:p>
-          <a:p>
-            <a:pPr lvl="2"/>
-            <a:r>
-              <a:rPr lang="en-US" smtClean="0"/>
-              <a:t>Third level</a:t>
-            </a:r>
-          </a:p>
-          <a:p>
-            <a:pPr lvl="3"/>
-            <a:r>
-              <a:rPr lang="en-US" smtClean="0"/>
-              <a:t>Fourth level</a:t>
-            </a:r>
-          </a:p>
-          <a:p>
-            <a:pPr lvl="4"/>
-            <a:r>
-              <a:rPr lang="en-US" smtClean="0"/>
-              <a:t>Fifth level</a:t>
-            </a:r>
-            <a:endParaRPr lang="en-US" dirty="0"/>
-          </a:p>
-        </p:txBody>
-      </p:sp>
-      <p:sp>
-        <p:nvSpPr>
-          <p:cNvPr id="7" name="Date Placeholder 6"/>
-          <p:cNvSpPr>
-            <a:spLocks noGrp="1"/>
-          </p:cNvSpPr>
-          <p:nvPr>
-            <p:ph type="dt" sz="half" idx="10"/>
-          </p:nvPr>
-        </p:nvSpPr>
-        <p:spPr/>
-        <p:txBody>
-          <a:bodyPr/>
-          <a:lstStyle/>
-          <a:p>
-            <a:fld id="{4EC5E9F4-ABA9-7C48-8C55-E350C4AB4067}" type="datetimeFigureOut">
-              <a:rPr lang="en-US" smtClean="0"/>
-              <a:t>2/27/17</a:t>
+              <a:t>4/3/22</a:t>
             </a:fld>
             <a:endParaRPr lang="en-US"/>
           </a:p>
@@ -1584,7 +1818,13 @@
       </p:sp>
       <p:sp>
         <p:nvSpPr>
-          <p:cNvPr id="8" name="Footer Placeholder 7"/>
+          <p:cNvPr id="8" name="Footer Placeholder 7">
+            <a:extLst>
+              <a:ext uri="{FF2B5EF4-FFF2-40B4-BE49-F238E27FC236}">
+                <a16:creationId xmlns:a16="http://schemas.microsoft.com/office/drawing/2014/main" id="{AC658EFB-7A34-9142-B67D-D70170535B1A}"/>
+              </a:ext>
+            </a:extLst>
+          </p:cNvPr>
           <p:cNvSpPr>
             <a:spLocks noGrp="1"/>
           </p:cNvSpPr>
@@ -1603,7 +1843,13 @@
       </p:sp>
       <p:sp>
         <p:nvSpPr>
-          <p:cNvPr id="9" name="Slide Number Placeholder 8"/>
+          <p:cNvPr id="9" name="Slide Number Placeholder 8">
+            <a:extLst>
+              <a:ext uri="{FF2B5EF4-FFF2-40B4-BE49-F238E27FC236}">
+                <a16:creationId xmlns:a16="http://schemas.microsoft.com/office/drawing/2014/main" id="{7FF97CB4-88C8-0A47-999D-22EAC5D3A761}"/>
+              </a:ext>
+            </a:extLst>
+          </p:cNvPr>
           <p:cNvSpPr>
             <a:spLocks noGrp="1"/>
           </p:cNvSpPr>
@@ -1616,7 +1862,7 @@
           <a:bodyPr/>
           <a:lstStyle/>
           <a:p>
-            <a:fld id="{C4BFC18F-573E-BC4B-9AA3-3EE86C20F1B5}" type="slidenum">
+            <a:fld id="{0809AB4E-5D06-5F4F-A150-12ECC82B436C}" type="slidenum">
               <a:rPr lang="en-US" smtClean="0"/>
               <a:t>‹#›</a:t>
             </a:fld>
@@ -1625,6 +1871,11 @@
         </p:txBody>
       </p:sp>
     </p:spTree>
+    <p:extLst>
+      <p:ext uri="{BB962C8B-B14F-4D97-AF65-F5344CB8AC3E}">
+        <p14:creationId xmlns:p14="http://schemas.microsoft.com/office/powerpoint/2010/main" val="2522833151"/>
+      </p:ext>
+    </p:extLst>
   </p:cSld>
   <p:clrMapOvr>
     <a:masterClrMapping/>
@@ -1651,7 +1902,13 @@
       </p:grpSpPr>
       <p:sp>
         <p:nvSpPr>
-          <p:cNvPr id="2" name="Title 1"/>
+          <p:cNvPr id="2" name="Title 1">
+            <a:extLst>
+              <a:ext uri="{FF2B5EF4-FFF2-40B4-BE49-F238E27FC236}">
+                <a16:creationId xmlns:a16="http://schemas.microsoft.com/office/drawing/2014/main" id="{ACD61D3B-D2BB-4147-BDD8-CCCF04C644B0}"/>
+              </a:ext>
+            </a:extLst>
+          </p:cNvPr>
           <p:cNvSpPr>
             <a:spLocks noGrp="1"/>
           </p:cNvSpPr>
@@ -1665,31 +1922,36 @@
           <a:lstStyle/>
           <a:p>
             <a:r>
+              <a:rPr lang="en-US"/>
+              <a:t>Click to edit Master title style</a:t>
+            </a:r>
+          </a:p>
+        </p:txBody>
+      </p:sp>
+      <p:sp>
+        <p:nvSpPr>
+          <p:cNvPr id="3" name="Date Placeholder 2">
+            <a:extLst>
+              <a:ext uri="{FF2B5EF4-FFF2-40B4-BE49-F238E27FC236}">
+                <a16:creationId xmlns:a16="http://schemas.microsoft.com/office/drawing/2014/main" id="{8B8BC29B-1F8B-6E4F-B2CD-B244F220E48E}"/>
+              </a:ext>
+            </a:extLst>
+          </p:cNvPr>
+          <p:cNvSpPr>
+            <a:spLocks noGrp="1"/>
+          </p:cNvSpPr>
+          <p:nvPr>
+            <p:ph type="dt" sz="half" idx="10"/>
+          </p:nvPr>
+        </p:nvSpPr>
+        <p:spPr/>
+        <p:txBody>
+          <a:bodyPr/>
+          <a:lstStyle/>
+          <a:p>
+            <a:fld id="{0860687E-B7E5-B148-8852-963D599D2C81}" type="datetimeFigureOut">
               <a:rPr lang="en-US" smtClean="0"/>
-              <a:t>Click to edit Master title style</a:t>
-            </a:r>
-            <a:endParaRPr lang="en-US" dirty="0"/>
-          </a:p>
-        </p:txBody>
-      </p:sp>
-      <p:sp>
-        <p:nvSpPr>
-          <p:cNvPr id="3" name="Date Placeholder 2"/>
-          <p:cNvSpPr>
-            <a:spLocks noGrp="1"/>
-          </p:cNvSpPr>
-          <p:nvPr>
-            <p:ph type="dt" sz="half" idx="10"/>
-          </p:nvPr>
-        </p:nvSpPr>
-        <p:spPr/>
-        <p:txBody>
-          <a:bodyPr/>
-          <a:lstStyle/>
-          <a:p>
-            <a:fld id="{4EC5E9F4-ABA9-7C48-8C55-E350C4AB4067}" type="datetimeFigureOut">
-              <a:rPr lang="en-US" smtClean="0"/>
-              <a:t>2/27/17</a:t>
+              <a:t>4/3/22</a:t>
             </a:fld>
             <a:endParaRPr lang="en-US"/>
           </a:p>
@@ -1697,7 +1959,13 @@
       </p:sp>
       <p:sp>
         <p:nvSpPr>
-          <p:cNvPr id="4" name="Footer Placeholder 3"/>
+          <p:cNvPr id="4" name="Footer Placeholder 3">
+            <a:extLst>
+              <a:ext uri="{FF2B5EF4-FFF2-40B4-BE49-F238E27FC236}">
+                <a16:creationId xmlns:a16="http://schemas.microsoft.com/office/drawing/2014/main" id="{A86351FA-94B9-9142-A14E-07DF6CA41D31}"/>
+              </a:ext>
+            </a:extLst>
+          </p:cNvPr>
           <p:cNvSpPr>
             <a:spLocks noGrp="1"/>
           </p:cNvSpPr>
@@ -1716,7 +1984,13 @@
       </p:sp>
       <p:sp>
         <p:nvSpPr>
-          <p:cNvPr id="5" name="Slide Number Placeholder 4"/>
+          <p:cNvPr id="5" name="Slide Number Placeholder 4">
+            <a:extLst>
+              <a:ext uri="{FF2B5EF4-FFF2-40B4-BE49-F238E27FC236}">
+                <a16:creationId xmlns:a16="http://schemas.microsoft.com/office/drawing/2014/main" id="{FFFD20CA-0C41-824A-9080-D0ED881F0674}"/>
+              </a:ext>
+            </a:extLst>
+          </p:cNvPr>
           <p:cNvSpPr>
             <a:spLocks noGrp="1"/>
           </p:cNvSpPr>
@@ -1729,7 +2003,7 @@
           <a:bodyPr/>
           <a:lstStyle/>
           <a:p>
-            <a:fld id="{C4BFC18F-573E-BC4B-9AA3-3EE86C20F1B5}" type="slidenum">
+            <a:fld id="{0809AB4E-5D06-5F4F-A150-12ECC82B436C}" type="slidenum">
               <a:rPr lang="en-US" smtClean="0"/>
               <a:t>‹#›</a:t>
             </a:fld>
@@ -1738,6 +2012,11 @@
         </p:txBody>
       </p:sp>
     </p:spTree>
+    <p:extLst>
+      <p:ext uri="{BB962C8B-B14F-4D97-AF65-F5344CB8AC3E}">
+        <p14:creationId xmlns:p14="http://schemas.microsoft.com/office/powerpoint/2010/main" val="3427947504"/>
+      </p:ext>
+    </p:extLst>
   </p:cSld>
   <p:clrMapOvr>
     <a:masterClrMapping/>
@@ -1764,7 +2043,13 @@
       </p:grpSpPr>
       <p:sp>
         <p:nvSpPr>
-          <p:cNvPr id="2" name="Date Placeholder 1"/>
+          <p:cNvPr id="2" name="Date Placeholder 1">
+            <a:extLst>
+              <a:ext uri="{FF2B5EF4-FFF2-40B4-BE49-F238E27FC236}">
+                <a16:creationId xmlns:a16="http://schemas.microsoft.com/office/drawing/2014/main" id="{CD0AA770-6656-7240-8237-73EB4176CFEA}"/>
+              </a:ext>
+            </a:extLst>
+          </p:cNvPr>
           <p:cNvSpPr>
             <a:spLocks noGrp="1"/>
           </p:cNvSpPr>
@@ -1777,9 +2062,9 @@
           <a:bodyPr/>
           <a:lstStyle/>
           <a:p>
-            <a:fld id="{4EC5E9F4-ABA9-7C48-8C55-E350C4AB4067}" type="datetimeFigureOut">
+            <a:fld id="{0860687E-B7E5-B148-8852-963D599D2C81}" type="datetimeFigureOut">
               <a:rPr lang="en-US" smtClean="0"/>
-              <a:t>2/27/17</a:t>
+              <a:t>4/3/22</a:t>
             </a:fld>
             <a:endParaRPr lang="en-US"/>
           </a:p>
@@ -1787,7 +2072,13 @@
       </p:sp>
       <p:sp>
         <p:nvSpPr>
-          <p:cNvPr id="3" name="Footer Placeholder 2"/>
+          <p:cNvPr id="3" name="Footer Placeholder 2">
+            <a:extLst>
+              <a:ext uri="{FF2B5EF4-FFF2-40B4-BE49-F238E27FC236}">
+                <a16:creationId xmlns:a16="http://schemas.microsoft.com/office/drawing/2014/main" id="{E2A237A3-8E0B-A847-BEAE-38179B3077FE}"/>
+              </a:ext>
+            </a:extLst>
+          </p:cNvPr>
           <p:cNvSpPr>
             <a:spLocks noGrp="1"/>
           </p:cNvSpPr>
@@ -1806,7 +2097,13 @@
       </p:sp>
       <p:sp>
         <p:nvSpPr>
-          <p:cNvPr id="4" name="Slide Number Placeholder 3"/>
+          <p:cNvPr id="4" name="Slide Number Placeholder 3">
+            <a:extLst>
+              <a:ext uri="{FF2B5EF4-FFF2-40B4-BE49-F238E27FC236}">
+                <a16:creationId xmlns:a16="http://schemas.microsoft.com/office/drawing/2014/main" id="{02034BC3-CAFA-3F40-9A73-C6347D29D344}"/>
+              </a:ext>
+            </a:extLst>
+          </p:cNvPr>
           <p:cNvSpPr>
             <a:spLocks noGrp="1"/>
           </p:cNvSpPr>
@@ -1819,7 +2116,7 @@
           <a:bodyPr/>
           <a:lstStyle/>
           <a:p>
-            <a:fld id="{C4BFC18F-573E-BC4B-9AA3-3EE86C20F1B5}" type="slidenum">
+            <a:fld id="{0809AB4E-5D06-5F4F-A150-12ECC82B436C}" type="slidenum">
               <a:rPr lang="en-US" smtClean="0"/>
               <a:t>‹#›</a:t>
             </a:fld>
@@ -1828,6 +2125,11 @@
         </p:txBody>
       </p:sp>
     </p:spTree>
+    <p:extLst>
+      <p:ext uri="{BB962C8B-B14F-4D97-AF65-F5344CB8AC3E}">
+        <p14:creationId xmlns:p14="http://schemas.microsoft.com/office/powerpoint/2010/main" val="3369849505"/>
+      </p:ext>
+    </p:extLst>
   </p:cSld>
   <p:clrMapOvr>
     <a:masterClrMapping/>
@@ -1854,7 +2156,13 @@
       </p:grpSpPr>
       <p:sp>
         <p:nvSpPr>
-          <p:cNvPr id="2" name="Title 1"/>
+          <p:cNvPr id="2" name="Title 1">
+            <a:extLst>
+              <a:ext uri="{FF2B5EF4-FFF2-40B4-BE49-F238E27FC236}">
+                <a16:creationId xmlns:a16="http://schemas.microsoft.com/office/drawing/2014/main" id="{27742FB1-21C8-C046-B094-9ACF99194E2C}"/>
+              </a:ext>
+            </a:extLst>
+          </p:cNvPr>
           <p:cNvSpPr>
             <a:spLocks noGrp="1"/>
           </p:cNvSpPr>
@@ -1864,8 +2172,8 @@
         </p:nvSpPr>
         <p:spPr>
           <a:xfrm>
-            <a:off x="629841" y="457200"/>
-            <a:ext cx="2949178" cy="1600200"/>
+            <a:off x="839788" y="457200"/>
+            <a:ext cx="3932237" cy="1600200"/>
           </a:xfrm>
         </p:spPr>
         <p:txBody>
@@ -1877,16 +2185,21 @@
           </a:lstStyle>
           <a:p>
             <a:r>
-              <a:rPr lang="en-US" smtClean="0"/>
+              <a:rPr lang="en-US"/>
               <a:t>Click to edit Master title style</a:t>
             </a:r>
-            <a:endParaRPr lang="en-US" dirty="0"/>
-          </a:p>
-        </p:txBody>
-      </p:sp>
-      <p:sp>
-        <p:nvSpPr>
-          <p:cNvPr id="3" name="Content Placeholder 2"/>
+          </a:p>
+        </p:txBody>
+      </p:sp>
+      <p:sp>
+        <p:nvSpPr>
+          <p:cNvPr id="3" name="Content Placeholder 2">
+            <a:extLst>
+              <a:ext uri="{FF2B5EF4-FFF2-40B4-BE49-F238E27FC236}">
+                <a16:creationId xmlns:a16="http://schemas.microsoft.com/office/drawing/2014/main" id="{F9823B95-BD4F-0945-B6DF-EC8D40E32879}"/>
+              </a:ext>
+            </a:extLst>
+          </p:cNvPr>
           <p:cNvSpPr>
             <a:spLocks noGrp="1"/>
           </p:cNvSpPr>
@@ -1896,8 +2209,8 @@
         </p:nvSpPr>
         <p:spPr>
           <a:xfrm>
-            <a:off x="3887391" y="987426"/>
-            <a:ext cx="4629150" cy="4873625"/>
+            <a:off x="5183188" y="987425"/>
+            <a:ext cx="6172200" cy="4873625"/>
           </a:xfrm>
         </p:spPr>
         <p:txBody>
@@ -1934,44 +2247,49 @@
           <a:p>
             <a:pPr lvl="0"/>
             <a:r>
-              <a:rPr lang="en-US" smtClean="0"/>
+              <a:rPr lang="en-US"/>
               <a:t>Click to edit Master text styles</a:t>
             </a:r>
           </a:p>
           <a:p>
             <a:pPr lvl="1"/>
             <a:r>
-              <a:rPr lang="en-US" smtClean="0"/>
+              <a:rPr lang="en-US"/>
               <a:t>Second level</a:t>
             </a:r>
           </a:p>
           <a:p>
             <a:pPr lvl="2"/>
             <a:r>
-              <a:rPr lang="en-US" smtClean="0"/>
+              <a:rPr lang="en-US"/>
               <a:t>Third level</a:t>
             </a:r>
           </a:p>
           <a:p>
             <a:pPr lvl="3"/>
             <a:r>
-              <a:rPr lang="en-US" smtClean="0"/>
+              <a:rPr lang="en-US"/>
               <a:t>Fourth level</a:t>
             </a:r>
           </a:p>
           <a:p>
             <a:pPr lvl="4"/>
             <a:r>
-              <a:rPr lang="en-US" smtClean="0"/>
+              <a:rPr lang="en-US"/>
               <a:t>Fifth level</a:t>
             </a:r>
-            <a:endParaRPr lang="en-US" dirty="0"/>
-          </a:p>
-        </p:txBody>
-      </p:sp>
-      <p:sp>
-        <p:nvSpPr>
-          <p:cNvPr id="4" name="Text Placeholder 3"/>
+          </a:p>
+        </p:txBody>
+      </p:sp>
+      <p:sp>
+        <p:nvSpPr>
+          <p:cNvPr id="4" name="Text Placeholder 3">
+            <a:extLst>
+              <a:ext uri="{FF2B5EF4-FFF2-40B4-BE49-F238E27FC236}">
+                <a16:creationId xmlns:a16="http://schemas.microsoft.com/office/drawing/2014/main" id="{356921B1-56C9-CA4F-B32D-C5F48EB309C5}"/>
+              </a:ext>
+            </a:extLst>
+          </p:cNvPr>
           <p:cNvSpPr>
             <a:spLocks noGrp="1"/>
           </p:cNvSpPr>
@@ -1981,8 +2299,8 @@
         </p:nvSpPr>
         <p:spPr>
           <a:xfrm>
-            <a:off x="629841" y="2057400"/>
-            <a:ext cx="2949178" cy="3811588"/>
+            <a:off x="839788" y="2057400"/>
+            <a:ext cx="3932237" cy="3811588"/>
           </a:xfrm>
         </p:spPr>
         <p:txBody>
@@ -2028,30 +2346,36 @@
           <a:p>
             <a:pPr lvl="0"/>
             <a:r>
+              <a:rPr lang="en-US"/>
+              <a:t>Click to edit Master text styles</a:t>
+            </a:r>
+          </a:p>
+        </p:txBody>
+      </p:sp>
+      <p:sp>
+        <p:nvSpPr>
+          <p:cNvPr id="5" name="Date Placeholder 4">
+            <a:extLst>
+              <a:ext uri="{FF2B5EF4-FFF2-40B4-BE49-F238E27FC236}">
+                <a16:creationId xmlns:a16="http://schemas.microsoft.com/office/drawing/2014/main" id="{7CFE727F-B49A-B44E-BEE9-CDB1F52D5362}"/>
+              </a:ext>
+            </a:extLst>
+          </p:cNvPr>
+          <p:cNvSpPr>
+            <a:spLocks noGrp="1"/>
+          </p:cNvSpPr>
+          <p:nvPr>
+            <p:ph type="dt" sz="half" idx="10"/>
+          </p:nvPr>
+        </p:nvSpPr>
+        <p:spPr/>
+        <p:txBody>
+          <a:bodyPr/>
+          <a:lstStyle/>
+          <a:p>
+            <a:fld id="{0860687E-B7E5-B148-8852-963D599D2C81}" type="datetimeFigureOut">
               <a:rPr lang="en-US" smtClean="0"/>
-              <a:t>Click to edit Master text styles</a:t>
-            </a:r>
-          </a:p>
-        </p:txBody>
-      </p:sp>
-      <p:sp>
-        <p:nvSpPr>
-          <p:cNvPr id="5" name="Date Placeholder 4"/>
-          <p:cNvSpPr>
-            <a:spLocks noGrp="1"/>
-          </p:cNvSpPr>
-          <p:nvPr>
-            <p:ph type="dt" sz="half" idx="10"/>
-          </p:nvPr>
-        </p:nvSpPr>
-        <p:spPr/>
-        <p:txBody>
-          <a:bodyPr/>
-          <a:lstStyle/>
-          <a:p>
-            <a:fld id="{4EC5E9F4-ABA9-7C48-8C55-E350C4AB4067}" type="datetimeFigureOut">
-              <a:rPr lang="en-US" smtClean="0"/>
-              <a:t>2/27/17</a:t>
+              <a:t>4/3/22</a:t>
             </a:fld>
             <a:endParaRPr lang="en-US"/>
           </a:p>
@@ -2059,7 +2383,13 @@
       </p:sp>
       <p:sp>
         <p:nvSpPr>
-          <p:cNvPr id="6" name="Footer Placeholder 5"/>
+          <p:cNvPr id="6" name="Footer Placeholder 5">
+            <a:extLst>
+              <a:ext uri="{FF2B5EF4-FFF2-40B4-BE49-F238E27FC236}">
+                <a16:creationId xmlns:a16="http://schemas.microsoft.com/office/drawing/2014/main" id="{94D429DA-E8E1-5F42-A8F0-CA525A9EC1AB}"/>
+              </a:ext>
+            </a:extLst>
+          </p:cNvPr>
           <p:cNvSpPr>
             <a:spLocks noGrp="1"/>
           </p:cNvSpPr>
@@ -2078,7 +2408,13 @@
       </p:sp>
       <p:sp>
         <p:nvSpPr>
-          <p:cNvPr id="7" name="Slide Number Placeholder 6"/>
+          <p:cNvPr id="7" name="Slide Number Placeholder 6">
+            <a:extLst>
+              <a:ext uri="{FF2B5EF4-FFF2-40B4-BE49-F238E27FC236}">
+                <a16:creationId xmlns:a16="http://schemas.microsoft.com/office/drawing/2014/main" id="{361DD41E-85D8-4D44-8044-D4A8F8E5264F}"/>
+              </a:ext>
+            </a:extLst>
+          </p:cNvPr>
           <p:cNvSpPr>
             <a:spLocks noGrp="1"/>
           </p:cNvSpPr>
@@ -2091,7 +2427,7 @@
           <a:bodyPr/>
           <a:lstStyle/>
           <a:p>
-            <a:fld id="{C4BFC18F-573E-BC4B-9AA3-3EE86C20F1B5}" type="slidenum">
+            <a:fld id="{0809AB4E-5D06-5F4F-A150-12ECC82B436C}" type="slidenum">
               <a:rPr lang="en-US" smtClean="0"/>
               <a:t>‹#›</a:t>
             </a:fld>
@@ -2100,6 +2436,11 @@
         </p:txBody>
       </p:sp>
     </p:spTree>
+    <p:extLst>
+      <p:ext uri="{BB962C8B-B14F-4D97-AF65-F5344CB8AC3E}">
+        <p14:creationId xmlns:p14="http://schemas.microsoft.com/office/powerpoint/2010/main" val="572956903"/>
+      </p:ext>
+    </p:extLst>
   </p:cSld>
   <p:clrMapOvr>
     <a:masterClrMapping/>
@@ -2126,7 +2467,13 @@
       </p:grpSpPr>
       <p:sp>
         <p:nvSpPr>
-          <p:cNvPr id="2" name="Title 1"/>
+          <p:cNvPr id="2" name="Title 1">
+            <a:extLst>
+              <a:ext uri="{FF2B5EF4-FFF2-40B4-BE49-F238E27FC236}">
+                <a16:creationId xmlns:a16="http://schemas.microsoft.com/office/drawing/2014/main" id="{69BA0267-8B54-D44E-B8DC-F75C5024E945}"/>
+              </a:ext>
+            </a:extLst>
+          </p:cNvPr>
           <p:cNvSpPr>
             <a:spLocks noGrp="1"/>
           </p:cNvSpPr>
@@ -2136,8 +2483,8 @@
         </p:nvSpPr>
         <p:spPr>
           <a:xfrm>
-            <a:off x="629841" y="457200"/>
-            <a:ext cx="2949178" cy="1600200"/>
+            <a:off x="839788" y="457200"/>
+            <a:ext cx="3932237" cy="1600200"/>
           </a:xfrm>
         </p:spPr>
         <p:txBody>
@@ -2149,18 +2496,23 @@
           </a:lstStyle>
           <a:p>
             <a:r>
-              <a:rPr lang="en-US" smtClean="0"/>
+              <a:rPr lang="en-US"/>
               <a:t>Click to edit Master title style</a:t>
             </a:r>
-            <a:endParaRPr lang="en-US" dirty="0"/>
-          </a:p>
-        </p:txBody>
-      </p:sp>
-      <p:sp>
-        <p:nvSpPr>
-          <p:cNvPr id="3" name="Picture Placeholder 2"/>
-          <p:cNvSpPr>
-            <a:spLocks noGrp="1" noChangeAspect="1"/>
+          </a:p>
+        </p:txBody>
+      </p:sp>
+      <p:sp>
+        <p:nvSpPr>
+          <p:cNvPr id="3" name="Picture Placeholder 2">
+            <a:extLst>
+              <a:ext uri="{FF2B5EF4-FFF2-40B4-BE49-F238E27FC236}">
+                <a16:creationId xmlns:a16="http://schemas.microsoft.com/office/drawing/2014/main" id="{DD1F4CAB-A3B4-534E-9E80-65306DAC9EA2}"/>
+              </a:ext>
+            </a:extLst>
+          </p:cNvPr>
+          <p:cNvSpPr>
+            <a:spLocks noGrp="1"/>
           </p:cNvSpPr>
           <p:nvPr>
             <p:ph type="pic" idx="1"/>
@@ -2168,12 +2520,12 @@
         </p:nvSpPr>
         <p:spPr>
           <a:xfrm>
-            <a:off x="3887391" y="987426"/>
-            <a:ext cx="4629150" cy="4873625"/>
+            <a:off x="5183188" y="987425"/>
+            <a:ext cx="6172200" cy="4873625"/>
           </a:xfrm>
         </p:spPr>
         <p:txBody>
-          <a:bodyPr anchor="t"/>
+          <a:bodyPr/>
           <a:lstStyle>
             <a:lvl1pPr marL="0" indent="0">
               <a:buNone/>
@@ -2213,17 +2565,19 @@
             </a:lvl9pPr>
           </a:lstStyle>
           <a:p>
-            <a:r>
-              <a:rPr lang="en-US" smtClean="0"/>
-              <a:t>Drag picture to placeholder or click icon to add</a:t>
-            </a:r>
-            <a:endParaRPr lang="en-US" dirty="0"/>
-          </a:p>
-        </p:txBody>
-      </p:sp>
-      <p:sp>
-        <p:nvSpPr>
-          <p:cNvPr id="4" name="Text Placeholder 3"/>
+            <a:endParaRPr lang="en-US"/>
+          </a:p>
+        </p:txBody>
+      </p:sp>
+      <p:sp>
+        <p:nvSpPr>
+          <p:cNvPr id="4" name="Text Placeholder 3">
+            <a:extLst>
+              <a:ext uri="{FF2B5EF4-FFF2-40B4-BE49-F238E27FC236}">
+                <a16:creationId xmlns:a16="http://schemas.microsoft.com/office/drawing/2014/main" id="{860ADE41-821F-9140-B1EB-BB343C9096A8}"/>
+              </a:ext>
+            </a:extLst>
+          </p:cNvPr>
           <p:cNvSpPr>
             <a:spLocks noGrp="1"/>
           </p:cNvSpPr>
@@ -2233,8 +2587,8 @@
         </p:nvSpPr>
         <p:spPr>
           <a:xfrm>
-            <a:off x="629841" y="2057400"/>
-            <a:ext cx="2949178" cy="3811588"/>
+            <a:off x="839788" y="2057400"/>
+            <a:ext cx="3932237" cy="3811588"/>
           </a:xfrm>
         </p:spPr>
         <p:txBody>
@@ -2280,30 +2634,36 @@
           <a:p>
             <a:pPr lvl="0"/>
             <a:r>
+              <a:rPr lang="en-US"/>
+              <a:t>Click to edit Master text styles</a:t>
+            </a:r>
+          </a:p>
+        </p:txBody>
+      </p:sp>
+      <p:sp>
+        <p:nvSpPr>
+          <p:cNvPr id="5" name="Date Placeholder 4">
+            <a:extLst>
+              <a:ext uri="{FF2B5EF4-FFF2-40B4-BE49-F238E27FC236}">
+                <a16:creationId xmlns:a16="http://schemas.microsoft.com/office/drawing/2014/main" id="{470C9E8B-B6A7-654B-AB1A-BB0634932884}"/>
+              </a:ext>
+            </a:extLst>
+          </p:cNvPr>
+          <p:cNvSpPr>
+            <a:spLocks noGrp="1"/>
+          </p:cNvSpPr>
+          <p:nvPr>
+            <p:ph type="dt" sz="half" idx="10"/>
+          </p:nvPr>
+        </p:nvSpPr>
+        <p:spPr/>
+        <p:txBody>
+          <a:bodyPr/>
+          <a:lstStyle/>
+          <a:p>
+            <a:fld id="{0860687E-B7E5-B148-8852-963D599D2C81}" type="datetimeFigureOut">
               <a:rPr lang="en-US" smtClean="0"/>
-              <a:t>Click to edit Master text styles</a:t>
-            </a:r>
-          </a:p>
-        </p:txBody>
-      </p:sp>
-      <p:sp>
-        <p:nvSpPr>
-          <p:cNvPr id="5" name="Date Placeholder 4"/>
-          <p:cNvSpPr>
-            <a:spLocks noGrp="1"/>
-          </p:cNvSpPr>
-          <p:nvPr>
-            <p:ph type="dt" sz="half" idx="10"/>
-          </p:nvPr>
-        </p:nvSpPr>
-        <p:spPr/>
-        <p:txBody>
-          <a:bodyPr/>
-          <a:lstStyle/>
-          <a:p>
-            <a:fld id="{4EC5E9F4-ABA9-7C48-8C55-E350C4AB4067}" type="datetimeFigureOut">
-              <a:rPr lang="en-US" smtClean="0"/>
-              <a:t>2/27/17</a:t>
+              <a:t>4/3/22</a:t>
             </a:fld>
             <a:endParaRPr lang="en-US"/>
           </a:p>
@@ -2311,7 +2671,13 @@
       </p:sp>
       <p:sp>
         <p:nvSpPr>
-          <p:cNvPr id="6" name="Footer Placeholder 5"/>
+          <p:cNvPr id="6" name="Footer Placeholder 5">
+            <a:extLst>
+              <a:ext uri="{FF2B5EF4-FFF2-40B4-BE49-F238E27FC236}">
+                <a16:creationId xmlns:a16="http://schemas.microsoft.com/office/drawing/2014/main" id="{4F5CDAF9-B13A-2743-A858-7879AE525DDA}"/>
+              </a:ext>
+            </a:extLst>
+          </p:cNvPr>
           <p:cNvSpPr>
             <a:spLocks noGrp="1"/>
           </p:cNvSpPr>
@@ -2330,7 +2696,13 @@
       </p:sp>
       <p:sp>
         <p:nvSpPr>
-          <p:cNvPr id="7" name="Slide Number Placeholder 6"/>
+          <p:cNvPr id="7" name="Slide Number Placeholder 6">
+            <a:extLst>
+              <a:ext uri="{FF2B5EF4-FFF2-40B4-BE49-F238E27FC236}">
+                <a16:creationId xmlns:a16="http://schemas.microsoft.com/office/drawing/2014/main" id="{8E34A78F-0821-AA4F-BBFB-A9EB023AE471}"/>
+              </a:ext>
+            </a:extLst>
+          </p:cNvPr>
           <p:cNvSpPr>
             <a:spLocks noGrp="1"/>
           </p:cNvSpPr>
@@ -2343,7 +2715,7 @@
           <a:bodyPr/>
           <a:lstStyle/>
           <a:p>
-            <a:fld id="{C4BFC18F-573E-BC4B-9AA3-3EE86C20F1B5}" type="slidenum">
+            <a:fld id="{0809AB4E-5D06-5F4F-A150-12ECC82B436C}" type="slidenum">
               <a:rPr lang="en-US" smtClean="0"/>
               <a:t>‹#›</a:t>
             </a:fld>
@@ -2352,6 +2724,11 @@
         </p:txBody>
       </p:sp>
     </p:spTree>
+    <p:extLst>
+      <p:ext uri="{BB962C8B-B14F-4D97-AF65-F5344CB8AC3E}">
+        <p14:creationId xmlns:p14="http://schemas.microsoft.com/office/powerpoint/2010/main" val="3543755642"/>
+      </p:ext>
+    </p:extLst>
   </p:cSld>
   <p:clrMapOvr>
     <a:masterClrMapping/>
@@ -2383,7 +2760,13 @@
       </p:grpSpPr>
       <p:sp>
         <p:nvSpPr>
-          <p:cNvPr id="2" name="Title Placeholder 1"/>
+          <p:cNvPr id="2" name="Title Placeholder 1">
+            <a:extLst>
+              <a:ext uri="{FF2B5EF4-FFF2-40B4-BE49-F238E27FC236}">
+                <a16:creationId xmlns:a16="http://schemas.microsoft.com/office/drawing/2014/main" id="{E039EF75-1EE0-394A-96C9-DFE43D9AC958}"/>
+              </a:ext>
+            </a:extLst>
+          </p:cNvPr>
           <p:cNvSpPr>
             <a:spLocks noGrp="1"/>
           </p:cNvSpPr>
@@ -2393,8 +2776,8 @@
         </p:nvSpPr>
         <p:spPr>
           <a:xfrm>
-            <a:off x="628650" y="365126"/>
-            <a:ext cx="7886700" cy="1325563"/>
+            <a:off x="838200" y="365125"/>
+            <a:ext cx="10515600" cy="1325563"/>
           </a:xfrm>
           <a:prstGeom prst="rect">
             <a:avLst/>
@@ -2407,16 +2790,21 @@
           <a:lstStyle/>
           <a:p>
             <a:r>
-              <a:rPr lang="en-US" smtClean="0"/>
+              <a:rPr lang="en-US"/>
               <a:t>Click to edit Master title style</a:t>
             </a:r>
-            <a:endParaRPr lang="en-US" dirty="0"/>
-          </a:p>
-        </p:txBody>
-      </p:sp>
-      <p:sp>
-        <p:nvSpPr>
-          <p:cNvPr id="3" name="Text Placeholder 2"/>
+          </a:p>
+        </p:txBody>
+      </p:sp>
+      <p:sp>
+        <p:nvSpPr>
+          <p:cNvPr id="3" name="Text Placeholder 2">
+            <a:extLst>
+              <a:ext uri="{FF2B5EF4-FFF2-40B4-BE49-F238E27FC236}">
+                <a16:creationId xmlns:a16="http://schemas.microsoft.com/office/drawing/2014/main" id="{A7C5280C-0344-2544-B94C-24D01EA36FA2}"/>
+              </a:ext>
+            </a:extLst>
+          </p:cNvPr>
           <p:cNvSpPr>
             <a:spLocks noGrp="1"/>
           </p:cNvSpPr>
@@ -2426,8 +2814,8 @@
         </p:nvSpPr>
         <p:spPr>
           <a:xfrm>
-            <a:off x="628650" y="1825625"/>
-            <a:ext cx="7886700" cy="4351338"/>
+            <a:off x="838200" y="1825625"/>
+            <a:ext cx="10515600" cy="4351338"/>
           </a:xfrm>
           <a:prstGeom prst="rect">
             <a:avLst/>
@@ -2441,44 +2829,49 @@
           <a:p>
             <a:pPr lvl="0"/>
             <a:r>
-              <a:rPr lang="en-US" smtClean="0"/>
+              <a:rPr lang="en-US"/>
               <a:t>Click to edit Master text styles</a:t>
             </a:r>
           </a:p>
           <a:p>
             <a:pPr lvl="1"/>
             <a:r>
-              <a:rPr lang="en-US" smtClean="0"/>
+              <a:rPr lang="en-US"/>
               <a:t>Second level</a:t>
             </a:r>
           </a:p>
           <a:p>
             <a:pPr lvl="2"/>
             <a:r>
-              <a:rPr lang="en-US" smtClean="0"/>
+              <a:rPr lang="en-US"/>
               <a:t>Third level</a:t>
             </a:r>
           </a:p>
           <a:p>
             <a:pPr lvl="3"/>
             <a:r>
-              <a:rPr lang="en-US" smtClean="0"/>
+              <a:rPr lang="en-US"/>
               <a:t>Fourth level</a:t>
             </a:r>
           </a:p>
           <a:p>
             <a:pPr lvl="4"/>
             <a:r>
-              <a:rPr lang="en-US" smtClean="0"/>
+              <a:rPr lang="en-US"/>
               <a:t>Fifth level</a:t>
             </a:r>
-            <a:endParaRPr lang="en-US" dirty="0"/>
-          </a:p>
-        </p:txBody>
-      </p:sp>
-      <p:sp>
-        <p:nvSpPr>
-          <p:cNvPr id="4" name="Date Placeholder 3"/>
+          </a:p>
+        </p:txBody>
+      </p:sp>
+      <p:sp>
+        <p:nvSpPr>
+          <p:cNvPr id="4" name="Date Placeholder 3">
+            <a:extLst>
+              <a:ext uri="{FF2B5EF4-FFF2-40B4-BE49-F238E27FC236}">
+                <a16:creationId xmlns:a16="http://schemas.microsoft.com/office/drawing/2014/main" id="{5BBA006F-0EEA-CB4B-BC29-C7B073BBD390}"/>
+              </a:ext>
+            </a:extLst>
+          </p:cNvPr>
           <p:cNvSpPr>
             <a:spLocks noGrp="1"/>
           </p:cNvSpPr>
@@ -2488,8 +2881,8 @@
         </p:nvSpPr>
         <p:spPr>
           <a:xfrm>
-            <a:off x="628650" y="6356351"/>
-            <a:ext cx="2057400" cy="365125"/>
+            <a:off x="838200" y="6356350"/>
+            <a:ext cx="2743200" cy="365125"/>
           </a:xfrm>
           <a:prstGeom prst="rect">
             <a:avLst/>
@@ -2509,9 +2902,9 @@
             </a:lvl1pPr>
           </a:lstStyle>
           <a:p>
-            <a:fld id="{4EC5E9F4-ABA9-7C48-8C55-E350C4AB4067}" type="datetimeFigureOut">
+            <a:fld id="{0860687E-B7E5-B148-8852-963D599D2C81}" type="datetimeFigureOut">
               <a:rPr lang="en-US" smtClean="0"/>
-              <a:t>2/27/17</a:t>
+              <a:t>4/3/22</a:t>
             </a:fld>
             <a:endParaRPr lang="en-US"/>
           </a:p>
@@ -2519,7 +2912,13 @@
       </p:sp>
       <p:sp>
         <p:nvSpPr>
-          <p:cNvPr id="5" name="Footer Placeholder 4"/>
+          <p:cNvPr id="5" name="Footer Placeholder 4">
+            <a:extLst>
+              <a:ext uri="{FF2B5EF4-FFF2-40B4-BE49-F238E27FC236}">
+                <a16:creationId xmlns:a16="http://schemas.microsoft.com/office/drawing/2014/main" id="{C19C1610-715A-EA4B-ADB2-027ED5E86DB0}"/>
+              </a:ext>
+            </a:extLst>
+          </p:cNvPr>
           <p:cNvSpPr>
             <a:spLocks noGrp="1"/>
           </p:cNvSpPr>
@@ -2529,8 +2928,8 @@
         </p:nvSpPr>
         <p:spPr>
           <a:xfrm>
-            <a:off x="3028950" y="6356351"/>
-            <a:ext cx="3086100" cy="365125"/>
+            <a:off x="4038600" y="6356350"/>
+            <a:ext cx="4114800" cy="365125"/>
           </a:xfrm>
           <a:prstGeom prst="rect">
             <a:avLst/>
@@ -2556,7 +2955,13 @@
       </p:sp>
       <p:sp>
         <p:nvSpPr>
-          <p:cNvPr id="6" name="Slide Number Placeholder 5"/>
+          <p:cNvPr id="6" name="Slide Number Placeholder 5">
+            <a:extLst>
+              <a:ext uri="{FF2B5EF4-FFF2-40B4-BE49-F238E27FC236}">
+                <a16:creationId xmlns:a16="http://schemas.microsoft.com/office/drawing/2014/main" id="{669E086A-E6DF-0D4B-9472-BD415BF8B5A5}"/>
+              </a:ext>
+            </a:extLst>
+          </p:cNvPr>
           <p:cNvSpPr>
             <a:spLocks noGrp="1"/>
           </p:cNvSpPr>
@@ -2566,8 +2971,8 @@
         </p:nvSpPr>
         <p:spPr>
           <a:xfrm>
-            <a:off x="6457950" y="6356351"/>
-            <a:ext cx="2057400" cy="365125"/>
+            <a:off x="8610600" y="6356350"/>
+            <a:ext cx="2743200" cy="365125"/>
           </a:xfrm>
           <a:prstGeom prst="rect">
             <a:avLst/>
@@ -2587,7 +2992,7 @@
             </a:lvl1pPr>
           </a:lstStyle>
           <a:p>
-            <a:fld id="{C4BFC18F-573E-BC4B-9AA3-3EE86C20F1B5}" type="slidenum">
+            <a:fld id="{0809AB4E-5D06-5F4F-A150-12ECC82B436C}" type="slidenum">
               <a:rPr lang="en-US" smtClean="0"/>
               <a:t>‹#›</a:t>
             </a:fld>
@@ -2598,23 +3003,23 @@
     </p:spTree>
     <p:extLst>
       <p:ext uri="{BB962C8B-B14F-4D97-AF65-F5344CB8AC3E}">
-        <p14:creationId xmlns:p14="http://schemas.microsoft.com/office/powerpoint/2010/main" val="831245717"/>
+        <p14:creationId xmlns:p14="http://schemas.microsoft.com/office/powerpoint/2010/main" val="2495772618"/>
       </p:ext>
     </p:extLst>
   </p:cSld>
   <p:clrMap bg1="lt1" tx1="dk1" bg2="lt2" tx2="dk2" accent1="accent1" accent2="accent2" accent3="accent3" accent4="accent4" accent5="accent5" accent6="accent6" hlink="hlink" folHlink="folHlink"/>
   <p:sldLayoutIdLst>
-    <p:sldLayoutId id="2147483661" r:id="rId1"/>
-    <p:sldLayoutId id="2147483662" r:id="rId2"/>
-    <p:sldLayoutId id="2147483663" r:id="rId3"/>
-    <p:sldLayoutId id="2147483664" r:id="rId4"/>
-    <p:sldLayoutId id="2147483665" r:id="rId5"/>
-    <p:sldLayoutId id="2147483666" r:id="rId6"/>
-    <p:sldLayoutId id="2147483667" r:id="rId7"/>
-    <p:sldLayoutId id="2147483668" r:id="rId8"/>
-    <p:sldLayoutId id="2147483669" r:id="rId9"/>
-    <p:sldLayoutId id="2147483670" r:id="rId10"/>
-    <p:sldLayoutId id="2147483671" r:id="rId11"/>
+    <p:sldLayoutId id="2147483649" r:id="rId1"/>
+    <p:sldLayoutId id="2147483650" r:id="rId2"/>
+    <p:sldLayoutId id="2147483651" r:id="rId3"/>
+    <p:sldLayoutId id="2147483652" r:id="rId4"/>
+    <p:sldLayoutId id="2147483653" r:id="rId5"/>
+    <p:sldLayoutId id="2147483654" r:id="rId6"/>
+    <p:sldLayoutId id="2147483655" r:id="rId7"/>
+    <p:sldLayoutId id="2147483656" r:id="rId8"/>
+    <p:sldLayoutId id="2147483657" r:id="rId9"/>
+    <p:sldLayoutId id="2147483658" r:id="rId10"/>
+    <p:sldLayoutId id="2147483659" r:id="rId11"/>
   </p:sldLayoutIdLst>
   <p:txStyles>
     <p:titleStyle>
@@ -2918,7 +3323,13 @@
       </p:grpSpPr>
       <p:sp>
         <p:nvSpPr>
-          <p:cNvPr id="2" name="Title 1"/>
+          <p:cNvPr id="2" name="Title 1">
+            <a:extLst>
+              <a:ext uri="{FF2B5EF4-FFF2-40B4-BE49-F238E27FC236}">
+                <a16:creationId xmlns:a16="http://schemas.microsoft.com/office/drawing/2014/main" id="{B5CF2D7E-E180-DB49-908E-E7254530D75D}"/>
+              </a:ext>
+            </a:extLst>
+          </p:cNvPr>
           <p:cNvSpPr>
             <a:spLocks noGrp="1"/>
           </p:cNvSpPr>
@@ -2937,7 +3348,13 @@
       </p:sp>
       <p:sp>
         <p:nvSpPr>
-          <p:cNvPr id="3" name="Subtitle 2"/>
+          <p:cNvPr id="3" name="Subtitle 2">
+            <a:extLst>
+              <a:ext uri="{FF2B5EF4-FFF2-40B4-BE49-F238E27FC236}">
+                <a16:creationId xmlns:a16="http://schemas.microsoft.com/office/drawing/2014/main" id="{391407E8-2BEF-B441-969C-6A5AD11D285E}"/>
+              </a:ext>
+            </a:extLst>
+          </p:cNvPr>
           <p:cNvSpPr>
             <a:spLocks noGrp="1"/>
           </p:cNvSpPr>
@@ -2957,7 +3374,7 @@
     </p:spTree>
     <p:extLst>
       <p:ext uri="{BB962C8B-B14F-4D97-AF65-F5344CB8AC3E}">
-        <p14:creationId xmlns:p14="http://schemas.microsoft.com/office/powerpoint/2010/main" val="1773973478"/>
+        <p14:creationId xmlns:p14="http://schemas.microsoft.com/office/powerpoint/2010/main" val="2190130964"/>
       </p:ext>
     </p:extLst>
   </p:cSld>
@@ -2970,7 +3387,7 @@
 <file path=ppt/theme/theme1.xml><?xml version="1.0" encoding="utf-8"?>
 <a:theme xmlns:a="http://schemas.openxmlformats.org/drawingml/2006/main" name="Office Theme">
   <a:themeElements>
-    <a:clrScheme name="Office Theme">
+    <a:clrScheme name="Office">
       <a:dk1>
         <a:sysClr val="windowText" lastClr="000000"/>
       </a:dk1>
@@ -3008,7 +3425,7 @@
         <a:srgbClr val="954F72"/>
       </a:folHlink>
     </a:clrScheme>
-    <a:fontScheme name="Office Theme">
+    <a:fontScheme name="Office">
       <a:majorFont>
         <a:latin typeface="Calibri Light" panose="020F0302020204030204"/>
         <a:ea typeface=""/>
@@ -3043,6 +3460,23 @@
         <a:font script="Viet" typeface="Times New Roman"/>
         <a:font script="Uigh" typeface="Microsoft Uighur"/>
         <a:font script="Geor" typeface="Sylfaen"/>
+        <a:font script="Armn" typeface="Arial"/>
+        <a:font script="Bugi" typeface="Leelawadee UI"/>
+        <a:font script="Bopo" typeface="Microsoft JhengHei"/>
+        <a:font script="Java" typeface="Javanese Text"/>
+        <a:font script="Lisu" typeface="Segoe UI"/>
+        <a:font script="Mymr" typeface="Myanmar Text"/>
+        <a:font script="Nkoo" typeface="Ebrima"/>
+        <a:font script="Olck" typeface="Nirmala UI"/>
+        <a:font script="Osma" typeface="Ebrima"/>
+        <a:font script="Phag" typeface="Phagspa"/>
+        <a:font script="Syrn" typeface="Estrangelo Edessa"/>
+        <a:font script="Syrj" typeface="Estrangelo Edessa"/>
+        <a:font script="Syre" typeface="Estrangelo Edessa"/>
+        <a:font script="Sora" typeface="Nirmala UI"/>
+        <a:font script="Tale" typeface="Microsoft Tai Le"/>
+        <a:font script="Talu" typeface="Microsoft New Tai Lue"/>
+        <a:font script="Tfng" typeface="Ebrima"/>
       </a:majorFont>
       <a:minorFont>
         <a:latin typeface="Calibri" panose="020F0502020204030204"/>
@@ -3078,9 +3512,26 @@
         <a:font script="Viet" typeface="Arial"/>
         <a:font script="Uigh" typeface="Microsoft Uighur"/>
         <a:font script="Geor" typeface="Sylfaen"/>
+        <a:font script="Armn" typeface="Arial"/>
+        <a:font script="Bugi" typeface="Leelawadee UI"/>
+        <a:font script="Bopo" typeface="Microsoft JhengHei"/>
+        <a:font script="Java" typeface="Javanese Text"/>
+        <a:font script="Lisu" typeface="Segoe UI"/>
+        <a:font script="Mymr" typeface="Myanmar Text"/>
+        <a:font script="Nkoo" typeface="Ebrima"/>
+        <a:font script="Olck" typeface="Nirmala UI"/>
+        <a:font script="Osma" typeface="Ebrima"/>
+        <a:font script="Phag" typeface="Phagspa"/>
+        <a:font script="Syrn" typeface="Estrangelo Edessa"/>
+        <a:font script="Syrj" typeface="Estrangelo Edessa"/>
+        <a:font script="Syre" typeface="Estrangelo Edessa"/>
+        <a:font script="Sora" typeface="Nirmala UI"/>
+        <a:font script="Tale" typeface="Microsoft Tai Le"/>
+        <a:font script="Talu" typeface="Microsoft New Tai Lue"/>
+        <a:font script="Tfng" typeface="Ebrima"/>
       </a:minorFont>
     </a:fontScheme>
-    <a:fmtScheme name="Office Theme">
+    <a:fmtScheme name="Office">
       <a:fillStyleLst>
         <a:solidFill>
           <a:schemeClr val="phClr"/>
